--- a/Day 22/SAP Build Training Day 22.pptx
+++ b/Day 22/SAP Build Training Day 22.pptx
@@ -5,29 +5,31 @@
     <p:sldMasterId id="2147483648" r:id="rId1"/>
   </p:sldMasterIdLst>
   <p:notesMasterIdLst>
-    <p:notesMasterId r:id="rId19"/>
+    <p:notesMasterId r:id="rId21"/>
   </p:notesMasterIdLst>
   <p:handoutMasterIdLst>
-    <p:handoutMasterId r:id="rId20"/>
+    <p:handoutMasterId r:id="rId22"/>
   </p:handoutMasterIdLst>
   <p:sldIdLst>
     <p:sldId id="256" r:id="rId2"/>
     <p:sldId id="494" r:id="rId3"/>
     <p:sldId id="265" r:id="rId4"/>
     <p:sldId id="535" r:id="rId5"/>
-    <p:sldId id="512" r:id="rId6"/>
-    <p:sldId id="514" r:id="rId7"/>
-    <p:sldId id="515" r:id="rId8"/>
-    <p:sldId id="516" r:id="rId9"/>
-    <p:sldId id="517" r:id="rId10"/>
-    <p:sldId id="518" r:id="rId11"/>
-    <p:sldId id="519" r:id="rId12"/>
-    <p:sldId id="520" r:id="rId13"/>
-    <p:sldId id="521" r:id="rId14"/>
-    <p:sldId id="537" r:id="rId15"/>
-    <p:sldId id="495" r:id="rId16"/>
-    <p:sldId id="496" r:id="rId17"/>
-    <p:sldId id="497" r:id="rId18"/>
+    <p:sldId id="507" r:id="rId6"/>
+    <p:sldId id="538" r:id="rId7"/>
+    <p:sldId id="512" r:id="rId8"/>
+    <p:sldId id="514" r:id="rId9"/>
+    <p:sldId id="515" r:id="rId10"/>
+    <p:sldId id="516" r:id="rId11"/>
+    <p:sldId id="517" r:id="rId12"/>
+    <p:sldId id="518" r:id="rId13"/>
+    <p:sldId id="519" r:id="rId14"/>
+    <p:sldId id="520" r:id="rId15"/>
+    <p:sldId id="521" r:id="rId16"/>
+    <p:sldId id="537" r:id="rId17"/>
+    <p:sldId id="495" r:id="rId18"/>
+    <p:sldId id="496" r:id="rId19"/>
+    <p:sldId id="497" r:id="rId20"/>
   </p:sldIdLst>
   <p:sldSz cx="9144000" cy="5143500" type="screen16x9"/>
   <p:notesSz cx="6858000" cy="9144000"/>
@@ -898,7 +900,7 @@
                 <a:tabLst/>
                 <a:defRPr/>
               </a:pPr>
-              <a:t>17</a:t>
+              <a:t>19</a:t>
             </a:fld>
             <a:endParaRPr kumimoji="0" lang="en-US" sz="1200" b="0" i="0" u="none" strike="noStrike" kern="1200" cap="none" spc="0" normalizeH="0" baseline="0" noProof="0">
               <a:ln>
@@ -5202,6 +5204,494 @@
         <p:cNvPr id="1" name="">
           <a:extLst>
             <a:ext uri="{FF2B5EF4-FFF2-40B4-BE49-F238E27FC236}">
+              <a16:creationId xmlns:a16="http://schemas.microsoft.com/office/drawing/2014/main" id="{0A03BCA9-CFCD-597D-1DAB-C01F7566B41A}"/>
+            </a:ext>
+          </a:extLst>
+        </p:cNvPr>
+        <p:cNvGrpSpPr/>
+        <p:nvPr/>
+      </p:nvGrpSpPr>
+      <p:grpSpPr>
+        <a:xfrm>
+          <a:off x="0" y="0"/>
+          <a:ext cx="0" cy="0"/>
+          <a:chOff x="0" y="0"/>
+          <a:chExt cx="0" cy="0"/>
+        </a:xfrm>
+      </p:grpSpPr>
+      <p:sp>
+        <p:nvSpPr>
+          <p:cNvPr id="3" name="Footer Placeholder 2">
+            <a:extLst>
+              <a:ext uri="{FF2B5EF4-FFF2-40B4-BE49-F238E27FC236}">
+                <a16:creationId xmlns:a16="http://schemas.microsoft.com/office/drawing/2014/main" id="{9C1BF838-FFA3-8D49-497D-77D5661D7025}"/>
+              </a:ext>
+            </a:extLst>
+          </p:cNvPr>
+          <p:cNvSpPr>
+            <a:spLocks noGrp="1"/>
+          </p:cNvSpPr>
+          <p:nvPr>
+            <p:ph type="ftr" sz="quarter" idx="11"/>
+          </p:nvPr>
+        </p:nvSpPr>
+        <p:spPr/>
+        <p:txBody>
+          <a:bodyPr/>
+          <a:lstStyle/>
+          <a:p>
+            <a:r>
+              <a:rPr lang="en-US" dirty="0"/>
+              <a:t>www.anubhavtrainings.com</a:t>
+            </a:r>
+          </a:p>
+        </p:txBody>
+      </p:sp>
+      <p:sp>
+        <p:nvSpPr>
+          <p:cNvPr id="4" name="Slide Number Placeholder 3">
+            <a:extLst>
+              <a:ext uri="{FF2B5EF4-FFF2-40B4-BE49-F238E27FC236}">
+                <a16:creationId xmlns:a16="http://schemas.microsoft.com/office/drawing/2014/main" id="{81648108-C9B3-B016-52FD-5090BB69C00F}"/>
+              </a:ext>
+            </a:extLst>
+          </p:cNvPr>
+          <p:cNvSpPr>
+            <a:spLocks noGrp="1"/>
+          </p:cNvSpPr>
+          <p:nvPr>
+            <p:ph type="sldNum" sz="quarter" idx="12"/>
+          </p:nvPr>
+        </p:nvSpPr>
+        <p:spPr>
+          <a:xfrm>
+            <a:off x="152400" y="4781550"/>
+            <a:ext cx="457200" cy="273844"/>
+          </a:xfrm>
+        </p:spPr>
+        <p:txBody>
+          <a:bodyPr/>
+          <a:lstStyle/>
+          <a:p>
+            <a:fld id="{B6F15528-21DE-4FAA-801E-634DDDAF4B2B}" type="slidenum">
+              <a:rPr lang="en-US" smtClean="0"/>
+              <a:pPr/>
+              <a:t>10</a:t>
+            </a:fld>
+            <a:endParaRPr lang="en-US" dirty="0"/>
+          </a:p>
+        </p:txBody>
+      </p:sp>
+      <p:sp>
+        <p:nvSpPr>
+          <p:cNvPr id="5" name="Title 4">
+            <a:extLst>
+              <a:ext uri="{FF2B5EF4-FFF2-40B4-BE49-F238E27FC236}">
+                <a16:creationId xmlns:a16="http://schemas.microsoft.com/office/drawing/2014/main" id="{98A2D139-4821-BFA6-161B-B1E8747D3BF1}"/>
+              </a:ext>
+            </a:extLst>
+          </p:cNvPr>
+          <p:cNvSpPr>
+            <a:spLocks noGrp="1"/>
+          </p:cNvSpPr>
+          <p:nvPr>
+            <p:ph type="title"/>
+          </p:nvPr>
+        </p:nvSpPr>
+        <p:spPr>
+          <a:xfrm>
+            <a:off x="76200" y="133350"/>
+            <a:ext cx="8229600" cy="533401"/>
+          </a:xfrm>
+        </p:spPr>
+        <p:txBody>
+          <a:bodyPr/>
+          <a:lstStyle/>
+          <a:p>
+            <a:r>
+              <a:rPr lang="en-US" sz="2500" dirty="0">
+                <a:latin typeface="Cooper Black" panose="0208090404030B020404" pitchFamily="18" charset="0"/>
+              </a:rPr>
+              <a:t>Additional Data Resource types</a:t>
+            </a:r>
+            <a:endParaRPr lang="en-IN" sz="2500" dirty="0">
+              <a:latin typeface="Cooper Black" panose="0208090404030B020404" pitchFamily="18" charset="0"/>
+            </a:endParaRPr>
+          </a:p>
+        </p:txBody>
+      </p:sp>
+      <p:sp>
+        <p:nvSpPr>
+          <p:cNvPr id="2" name="TextBox 1">
+            <a:extLst>
+              <a:ext uri="{FF2B5EF4-FFF2-40B4-BE49-F238E27FC236}">
+                <a16:creationId xmlns:a16="http://schemas.microsoft.com/office/drawing/2014/main" id="{C565383F-0933-2687-340E-3CD0BC8BD04B}"/>
+              </a:ext>
+            </a:extLst>
+          </p:cNvPr>
+          <p:cNvSpPr txBox="1"/>
+          <p:nvPr/>
+        </p:nvSpPr>
+        <p:spPr>
+          <a:xfrm>
+            <a:off x="152400" y="971549"/>
+            <a:ext cx="8839200" cy="4069557"/>
+          </a:xfrm>
+          <a:prstGeom prst="rect">
+            <a:avLst/>
+          </a:prstGeom>
+        </p:spPr>
+        <p:txBody>
+          <a:bodyPr vert="horz" lIns="91440" tIns="45720" rIns="91440" bIns="45720" rtlCol="0">
+            <a:normAutofit/>
+          </a:bodyPr>
+          <a:lstStyle/>
+          <a:p>
+            <a:pPr>
+              <a:spcBef>
+                <a:spcPct val="20000"/>
+              </a:spcBef>
+              <a:buFont typeface="Arial" pitchFamily="34" charset="0"/>
+            </a:pPr>
+            <a:r>
+              <a:rPr lang="en-US" sz="1400" b="0" i="0" dirty="0">
+                <a:solidFill>
+                  <a:srgbClr val="223548"/>
+                </a:solidFill>
+                <a:effectLst/>
+                <a:latin typeface="72 Brand Variable"/>
+              </a:rPr>
+              <a:t>There are some additional and important data resource types – especially for use in connecting to SAP back-ends – that depend on users being authenticated via SAP BTP</a:t>
+            </a:r>
+          </a:p>
+          <a:p>
+            <a:pPr>
+              <a:spcBef>
+                <a:spcPct val="20000"/>
+              </a:spcBef>
+              <a:buFont typeface="Arial" pitchFamily="34" charset="0"/>
+            </a:pPr>
+            <a:endParaRPr lang="en-US" sz="1400" dirty="0">
+              <a:solidFill>
+                <a:srgbClr val="223548"/>
+              </a:solidFill>
+              <a:latin typeface="72 Brand Variable"/>
+            </a:endParaRPr>
+          </a:p>
+          <a:p>
+            <a:pPr>
+              <a:spcBef>
+                <a:spcPct val="20000"/>
+              </a:spcBef>
+              <a:buFont typeface="Arial" pitchFamily="34" charset="0"/>
+            </a:pPr>
+            <a:r>
+              <a:rPr lang="en-US" sz="1400" b="1" dirty="0"/>
+              <a:t>Visual Cloud Functions Integration</a:t>
+            </a:r>
+            <a:r>
+              <a:rPr lang="en-US" sz="1400" dirty="0"/>
+              <a:t> - Visual Cloud Functions lets you easily create your own data store, not just connect to an existing one, and let multiple apps access it and let you share the data among many users.</a:t>
+            </a:r>
+          </a:p>
+          <a:p>
+            <a:pPr>
+              <a:spcBef>
+                <a:spcPct val="20000"/>
+              </a:spcBef>
+              <a:buFont typeface="Arial" pitchFamily="34" charset="0"/>
+            </a:pPr>
+            <a:r>
+              <a:rPr lang="en-US" sz="1400" b="1" dirty="0"/>
+              <a:t>OData Integration with BTP Destination</a:t>
+            </a:r>
+            <a:r>
+              <a:rPr lang="en-US" sz="1400" dirty="0"/>
+              <a:t> - OData with a BTP destination is the same as without except that the URL and authentication is defined by an SAP BTP destination.</a:t>
+            </a:r>
+          </a:p>
+          <a:p>
+            <a:pPr>
+              <a:spcBef>
+                <a:spcPct val="20000"/>
+              </a:spcBef>
+              <a:buFont typeface="Arial" pitchFamily="34" charset="0"/>
+            </a:pPr>
+            <a:r>
+              <a:rPr lang="en-US" sz="1400" b="1" dirty="0"/>
+              <a:t>REST Integration with BTP Destinations</a:t>
+            </a:r>
+            <a:r>
+              <a:rPr lang="en-US" sz="1400" dirty="0"/>
+              <a:t> - REST with a BTP destination is the same as without except that the URL and authentication is defined by an SAP BTP destination.</a:t>
+            </a:r>
+          </a:p>
+          <a:p>
+            <a:pPr>
+              <a:spcBef>
+                <a:spcPct val="20000"/>
+              </a:spcBef>
+              <a:buFont typeface="Arial" pitchFamily="34" charset="0"/>
+            </a:pPr>
+            <a:endParaRPr lang="en-US" sz="1400" dirty="0"/>
+          </a:p>
+        </p:txBody>
+      </p:sp>
+    </p:spTree>
+    <p:extLst>
+      <p:ext uri="{BB962C8B-B14F-4D97-AF65-F5344CB8AC3E}">
+        <p14:creationId xmlns:p14="http://schemas.microsoft.com/office/powerpoint/2010/main" val="2002470741"/>
+      </p:ext>
+    </p:extLst>
+  </p:cSld>
+  <p:clrMapOvr>
+    <a:masterClrMapping/>
+  </p:clrMapOvr>
+  <mc:AlternateContent xmlns:mc="http://schemas.openxmlformats.org/markup-compatibility/2006" xmlns:p14="http://schemas.microsoft.com/office/powerpoint/2010/main">
+    <mc:Choice Requires="p14">
+      <p:transition spd="med" p14:dur="700">
+        <p:fade/>
+      </p:transition>
+    </mc:Choice>
+    <mc:Fallback xmlns="">
+      <p:transition spd="med">
+        <p:fade/>
+      </p:transition>
+    </mc:Fallback>
+  </mc:AlternateContent>
+</p:sld>
+</file>
+
+<file path=ppt/slides/slide11.xml><?xml version="1.0" encoding="utf-8"?>
+<p:sld xmlns:a="http://schemas.openxmlformats.org/drawingml/2006/main" xmlns:r="http://schemas.openxmlformats.org/officeDocument/2006/relationships" xmlns:p="http://schemas.openxmlformats.org/presentationml/2006/main">
+  <p:cSld>
+    <p:spTree>
+      <p:nvGrpSpPr>
+        <p:cNvPr id="1" name="">
+          <a:extLst>
+            <a:ext uri="{FF2B5EF4-FFF2-40B4-BE49-F238E27FC236}">
+              <a16:creationId xmlns:a16="http://schemas.microsoft.com/office/drawing/2014/main" id="{63D0D6BA-3567-668B-95CA-1594D6F9655D}"/>
+            </a:ext>
+          </a:extLst>
+        </p:cNvPr>
+        <p:cNvGrpSpPr/>
+        <p:nvPr/>
+      </p:nvGrpSpPr>
+      <p:grpSpPr>
+        <a:xfrm>
+          <a:off x="0" y="0"/>
+          <a:ext cx="0" cy="0"/>
+          <a:chOff x="0" y="0"/>
+          <a:chExt cx="0" cy="0"/>
+        </a:xfrm>
+      </p:grpSpPr>
+      <p:sp>
+        <p:nvSpPr>
+          <p:cNvPr id="3" name="Footer Placeholder 2">
+            <a:extLst>
+              <a:ext uri="{FF2B5EF4-FFF2-40B4-BE49-F238E27FC236}">
+                <a16:creationId xmlns:a16="http://schemas.microsoft.com/office/drawing/2014/main" id="{74E58177-4A88-4D15-D620-7BD57D356997}"/>
+              </a:ext>
+            </a:extLst>
+          </p:cNvPr>
+          <p:cNvSpPr>
+            <a:spLocks noGrp="1"/>
+          </p:cNvSpPr>
+          <p:nvPr>
+            <p:ph type="ftr" sz="quarter" idx="11"/>
+          </p:nvPr>
+        </p:nvSpPr>
+        <p:spPr/>
+        <p:txBody>
+          <a:bodyPr/>
+          <a:lstStyle/>
+          <a:p>
+            <a:r>
+              <a:rPr lang="en-US" dirty="0"/>
+              <a:t>www.anubhavtrainings.com</a:t>
+            </a:r>
+          </a:p>
+        </p:txBody>
+      </p:sp>
+      <p:sp>
+        <p:nvSpPr>
+          <p:cNvPr id="4" name="Slide Number Placeholder 3">
+            <a:extLst>
+              <a:ext uri="{FF2B5EF4-FFF2-40B4-BE49-F238E27FC236}">
+                <a16:creationId xmlns:a16="http://schemas.microsoft.com/office/drawing/2014/main" id="{BCAF5441-0C97-DF54-0FED-E24830EC8A76}"/>
+              </a:ext>
+            </a:extLst>
+          </p:cNvPr>
+          <p:cNvSpPr>
+            <a:spLocks noGrp="1"/>
+          </p:cNvSpPr>
+          <p:nvPr>
+            <p:ph type="sldNum" sz="quarter" idx="12"/>
+          </p:nvPr>
+        </p:nvSpPr>
+        <p:spPr>
+          <a:xfrm>
+            <a:off x="152400" y="4781550"/>
+            <a:ext cx="457200" cy="273844"/>
+          </a:xfrm>
+        </p:spPr>
+        <p:txBody>
+          <a:bodyPr/>
+          <a:lstStyle/>
+          <a:p>
+            <a:fld id="{B6F15528-21DE-4FAA-801E-634DDDAF4B2B}" type="slidenum">
+              <a:rPr lang="en-US" smtClean="0"/>
+              <a:pPr/>
+              <a:t>11</a:t>
+            </a:fld>
+            <a:endParaRPr lang="en-US" dirty="0"/>
+          </a:p>
+        </p:txBody>
+      </p:sp>
+      <p:sp>
+        <p:nvSpPr>
+          <p:cNvPr id="5" name="Title 4">
+            <a:extLst>
+              <a:ext uri="{FF2B5EF4-FFF2-40B4-BE49-F238E27FC236}">
+                <a16:creationId xmlns:a16="http://schemas.microsoft.com/office/drawing/2014/main" id="{3488BEF7-4195-D3AC-D899-F2F442A4BA80}"/>
+              </a:ext>
+            </a:extLst>
+          </p:cNvPr>
+          <p:cNvSpPr>
+            <a:spLocks noGrp="1"/>
+          </p:cNvSpPr>
+          <p:nvPr>
+            <p:ph type="title"/>
+          </p:nvPr>
+        </p:nvSpPr>
+        <p:spPr>
+          <a:xfrm>
+            <a:off x="76200" y="133350"/>
+            <a:ext cx="8229600" cy="533401"/>
+          </a:xfrm>
+        </p:spPr>
+        <p:txBody>
+          <a:bodyPr/>
+          <a:lstStyle/>
+          <a:p>
+            <a:r>
+              <a:rPr lang="en-US" sz="2500" dirty="0">
+                <a:latin typeface="Cooper Black" panose="0208090404030B020404" pitchFamily="18" charset="0"/>
+              </a:rPr>
+              <a:t>What is Destination in BTP</a:t>
+            </a:r>
+            <a:endParaRPr lang="en-IN" sz="2500" dirty="0">
+              <a:latin typeface="Cooper Black" panose="0208090404030B020404" pitchFamily="18" charset="0"/>
+            </a:endParaRPr>
+          </a:p>
+        </p:txBody>
+      </p:sp>
+      <p:sp>
+        <p:nvSpPr>
+          <p:cNvPr id="2" name="TextBox 1">
+            <a:extLst>
+              <a:ext uri="{FF2B5EF4-FFF2-40B4-BE49-F238E27FC236}">
+                <a16:creationId xmlns:a16="http://schemas.microsoft.com/office/drawing/2014/main" id="{B8DAA500-1F14-B33A-76BA-60D0BB21A4B9}"/>
+              </a:ext>
+            </a:extLst>
+          </p:cNvPr>
+          <p:cNvSpPr txBox="1"/>
+          <p:nvPr/>
+        </p:nvSpPr>
+        <p:spPr>
+          <a:xfrm>
+            <a:off x="152400" y="971549"/>
+            <a:ext cx="8839200" cy="4069557"/>
+          </a:xfrm>
+          <a:prstGeom prst="rect">
+            <a:avLst/>
+          </a:prstGeom>
+        </p:spPr>
+        <p:txBody>
+          <a:bodyPr vert="horz" lIns="91440" tIns="45720" rIns="91440" bIns="45720" rtlCol="0">
+            <a:normAutofit/>
+          </a:bodyPr>
+          <a:lstStyle/>
+          <a:p>
+            <a:pPr>
+              <a:spcBef>
+                <a:spcPct val="20000"/>
+              </a:spcBef>
+              <a:buFont typeface="Arial" pitchFamily="34" charset="0"/>
+            </a:pPr>
+            <a:r>
+              <a:rPr lang="en-US" sz="1400" b="1" dirty="0"/>
+              <a:t>SAP BTP Destination</a:t>
+            </a:r>
+            <a:r>
+              <a:rPr lang="en-US" sz="1400" dirty="0"/>
+              <a:t> is a configuration object within </a:t>
+            </a:r>
+            <a:r>
+              <a:rPr lang="en-US" sz="1400" b="1" dirty="0"/>
+              <a:t>SAP Business Technology Platform (BTP)</a:t>
+            </a:r>
+            <a:r>
+              <a:rPr lang="en-US" sz="1400" dirty="0"/>
+              <a:t> that allows applications to connect to external systems or services in a secure and managed way. </a:t>
+            </a:r>
+          </a:p>
+          <a:p>
+            <a:pPr>
+              <a:spcBef>
+                <a:spcPct val="20000"/>
+              </a:spcBef>
+              <a:buFont typeface="Arial" pitchFamily="34" charset="0"/>
+            </a:pPr>
+            <a:endParaRPr lang="en-US" sz="1400" dirty="0"/>
+          </a:p>
+          <a:p>
+            <a:pPr>
+              <a:spcBef>
+                <a:spcPct val="20000"/>
+              </a:spcBef>
+              <a:buFont typeface="Arial" pitchFamily="34" charset="0"/>
+            </a:pPr>
+            <a:r>
+              <a:rPr lang="en-US" sz="1400" dirty="0"/>
+              <a:t>These destinations store connection settings like URLs, authentication, and proxy settings, enabling seamless communication between your BTP applications (like those running on SAP CAP, UI5, or Fiori) and other systems (such as on-premise SAP systems, third-party APIs, or cloud services).</a:t>
+            </a:r>
+          </a:p>
+        </p:txBody>
+      </p:sp>
+    </p:spTree>
+    <p:extLst>
+      <p:ext uri="{BB962C8B-B14F-4D97-AF65-F5344CB8AC3E}">
+        <p14:creationId xmlns:p14="http://schemas.microsoft.com/office/powerpoint/2010/main" val="4208077122"/>
+      </p:ext>
+    </p:extLst>
+  </p:cSld>
+  <p:clrMapOvr>
+    <a:masterClrMapping/>
+  </p:clrMapOvr>
+  <mc:AlternateContent xmlns:mc="http://schemas.openxmlformats.org/markup-compatibility/2006" xmlns:p14="http://schemas.microsoft.com/office/powerpoint/2010/main">
+    <mc:Choice Requires="p14">
+      <p:transition spd="med" p14:dur="700">
+        <p:fade/>
+      </p:transition>
+    </mc:Choice>
+    <mc:Fallback xmlns="">
+      <p:transition spd="med">
+        <p:fade/>
+      </p:transition>
+    </mc:Fallback>
+  </mc:AlternateContent>
+</p:sld>
+</file>
+
+<file path=ppt/slides/slide12.xml><?xml version="1.0" encoding="utf-8"?>
+<p:sld xmlns:a="http://schemas.openxmlformats.org/drawingml/2006/main" xmlns:r="http://schemas.openxmlformats.org/officeDocument/2006/relationships" xmlns:p="http://schemas.openxmlformats.org/presentationml/2006/main">
+  <p:cSld>
+    <p:spTree>
+      <p:nvGrpSpPr>
+        <p:cNvPr id="1" name="">
+          <a:extLst>
+            <a:ext uri="{FF2B5EF4-FFF2-40B4-BE49-F238E27FC236}">
               <a16:creationId xmlns:a16="http://schemas.microsoft.com/office/drawing/2014/main" id="{B640DC5E-1566-E826-C33E-B4CA0F39484A}"/>
             </a:ext>
           </a:extLst>
@@ -5274,7 +5764,7 @@
             <a:fld id="{B6F15528-21DE-4FAA-801E-634DDDAF4B2B}" type="slidenum">
               <a:rPr lang="en-US" smtClean="0"/>
               <a:pPr/>
-              <a:t>10</a:t>
+              <a:t>12</a:t>
             </a:fld>
             <a:endParaRPr lang="en-US" dirty="0"/>
           </a:p>
@@ -5643,7 +6133,7 @@
 </p:sld>
 </file>
 
-<file path=ppt/slides/slide11.xml><?xml version="1.0" encoding="utf-8"?>
+<file path=ppt/slides/slide13.xml><?xml version="1.0" encoding="utf-8"?>
 <p:sld xmlns:a="http://schemas.openxmlformats.org/drawingml/2006/main" xmlns:r="http://schemas.openxmlformats.org/officeDocument/2006/relationships" xmlns:p="http://schemas.openxmlformats.org/presentationml/2006/main">
   <p:cSld>
     <p:spTree>
@@ -5724,7 +6214,7 @@
             <a:fld id="{B6F15528-21DE-4FAA-801E-634DDDAF4B2B}" type="slidenum">
               <a:rPr lang="en-US" smtClean="0"/>
               <a:pPr/>
-              <a:t>11</a:t>
+              <a:t>13</a:t>
             </a:fld>
             <a:endParaRPr lang="en-US" dirty="0"/>
           </a:p>
@@ -6072,7 +6562,7 @@
 </p:sld>
 </file>
 
-<file path=ppt/slides/slide12.xml><?xml version="1.0" encoding="utf-8"?>
+<file path=ppt/slides/slide14.xml><?xml version="1.0" encoding="utf-8"?>
 <p:sld xmlns:a="http://schemas.openxmlformats.org/drawingml/2006/main" xmlns:r="http://schemas.openxmlformats.org/officeDocument/2006/relationships" xmlns:p="http://schemas.openxmlformats.org/presentationml/2006/main">
   <p:cSld>
     <p:spTree>
@@ -6152,7 +6642,7 @@
             <a:fld id="{B6F15528-21DE-4FAA-801E-634DDDAF4B2B}" type="slidenum">
               <a:rPr lang="en-US" smtClean="0"/>
               <a:pPr/>
-              <a:t>12</a:t>
+              <a:t>14</a:t>
             </a:fld>
             <a:endParaRPr lang="en-US" dirty="0"/>
           </a:p>
@@ -6453,7 +6943,7 @@
 </p:sld>
 </file>
 
-<file path=ppt/slides/slide13.xml><?xml version="1.0" encoding="utf-8"?>
+<file path=ppt/slides/slide15.xml><?xml version="1.0" encoding="utf-8"?>
 <p:sld xmlns:a="http://schemas.openxmlformats.org/drawingml/2006/main" xmlns:r="http://schemas.openxmlformats.org/officeDocument/2006/relationships" xmlns:p="http://schemas.openxmlformats.org/presentationml/2006/main">
   <p:cSld>
     <p:spTree>
@@ -6533,7 +7023,7 @@
             <a:fld id="{B6F15528-21DE-4FAA-801E-634DDDAF4B2B}" type="slidenum">
               <a:rPr lang="en-US" smtClean="0"/>
               <a:pPr/>
-              <a:t>13</a:t>
+              <a:t>15</a:t>
             </a:fld>
             <a:endParaRPr lang="en-US" dirty="0"/>
           </a:p>
@@ -6731,7 +7221,7 @@
 </p:sld>
 </file>
 
-<file path=ppt/slides/slide14.xml><?xml version="1.0" encoding="utf-8"?>
+<file path=ppt/slides/slide16.xml><?xml version="1.0" encoding="utf-8"?>
 <p:sld xmlns:a="http://schemas.openxmlformats.org/drawingml/2006/main" xmlns:r="http://schemas.openxmlformats.org/officeDocument/2006/relationships" xmlns:p="http://schemas.openxmlformats.org/presentationml/2006/main">
   <p:cSld>
     <p:spTree>
@@ -6801,7 +7291,7 @@
             <a:fld id="{B6F15528-21DE-4FAA-801E-634DDDAF4B2B}" type="slidenum">
               <a:rPr lang="en-US" smtClean="0"/>
               <a:pPr/>
-              <a:t>14</a:t>
+              <a:t>16</a:t>
             </a:fld>
             <a:endParaRPr lang="en-US"/>
           </a:p>
@@ -6896,7 +7386,7 @@
 </p:sld>
 </file>
 
-<file path=ppt/slides/slide15.xml><?xml version="1.0" encoding="utf-8"?>
+<file path=ppt/slides/slide17.xml><?xml version="1.0" encoding="utf-8"?>
 <p:sld xmlns:a="http://schemas.openxmlformats.org/drawingml/2006/main" xmlns:r="http://schemas.openxmlformats.org/officeDocument/2006/relationships" xmlns:p="http://schemas.openxmlformats.org/presentationml/2006/main">
   <p:cSld>
     <p:spTree>
@@ -7890,7 +8380,7 @@
 </p:sld>
 </file>
 
-<file path=ppt/slides/slide16.xml><?xml version="1.0" encoding="utf-8"?>
+<file path=ppt/slides/slide18.xml><?xml version="1.0" encoding="utf-8"?>
 <p:sld xmlns:a="http://schemas.openxmlformats.org/drawingml/2006/main" xmlns:r="http://schemas.openxmlformats.org/officeDocument/2006/relationships" xmlns:p="http://schemas.openxmlformats.org/presentationml/2006/main">
   <p:cSld>
     <p:spTree>
@@ -9430,7 +9920,7 @@
 </p:sld>
 </file>
 
-<file path=ppt/slides/slide17.xml><?xml version="1.0" encoding="utf-8"?>
+<file path=ppt/slides/slide19.xml><?xml version="1.0" encoding="utf-8"?>
 <p:sld xmlns:a="http://schemas.openxmlformats.org/drawingml/2006/main" xmlns:r="http://schemas.openxmlformats.org/officeDocument/2006/relationships" xmlns:p="http://schemas.openxmlformats.org/presentationml/2006/main">
   <p:cSld>
     <p:spTree>
@@ -13860,6 +14350,1248 @@
         <p:cNvPr id="1" name="">
           <a:extLst>
             <a:ext uri="{FF2B5EF4-FFF2-40B4-BE49-F238E27FC236}">
+              <a16:creationId xmlns:a16="http://schemas.microsoft.com/office/drawing/2014/main" id="{8FD7295B-D009-F32E-A01A-8A8CC18FEA22}"/>
+            </a:ext>
+          </a:extLst>
+        </p:cNvPr>
+        <p:cNvGrpSpPr/>
+        <p:nvPr/>
+      </p:nvGrpSpPr>
+      <p:grpSpPr>
+        <a:xfrm>
+          <a:off x="0" y="0"/>
+          <a:ext cx="0" cy="0"/>
+          <a:chOff x="0" y="0"/>
+          <a:chExt cx="0" cy="0"/>
+        </a:xfrm>
+      </p:grpSpPr>
+      <p:sp>
+        <p:nvSpPr>
+          <p:cNvPr id="3" name="Footer Placeholder 2">
+            <a:extLst>
+              <a:ext uri="{FF2B5EF4-FFF2-40B4-BE49-F238E27FC236}">
+                <a16:creationId xmlns:a16="http://schemas.microsoft.com/office/drawing/2014/main" id="{D5B543E2-7625-ECE1-C46E-CFB3659168B8}"/>
+              </a:ext>
+            </a:extLst>
+          </p:cNvPr>
+          <p:cNvSpPr>
+            <a:spLocks noGrp="1"/>
+          </p:cNvSpPr>
+          <p:nvPr>
+            <p:ph type="ftr" sz="quarter" idx="11"/>
+          </p:nvPr>
+        </p:nvSpPr>
+        <p:spPr/>
+        <p:txBody>
+          <a:bodyPr/>
+          <a:lstStyle/>
+          <a:p>
+            <a:r>
+              <a:rPr lang="en-US" dirty="0"/>
+              <a:t>www.anubhavtrainings.com</a:t>
+            </a:r>
+          </a:p>
+        </p:txBody>
+      </p:sp>
+      <p:sp>
+        <p:nvSpPr>
+          <p:cNvPr id="4" name="Slide Number Placeholder 3">
+            <a:extLst>
+              <a:ext uri="{FF2B5EF4-FFF2-40B4-BE49-F238E27FC236}">
+                <a16:creationId xmlns:a16="http://schemas.microsoft.com/office/drawing/2014/main" id="{7F90F182-D2C5-A02D-2F2A-729242AD767F}"/>
+              </a:ext>
+            </a:extLst>
+          </p:cNvPr>
+          <p:cNvSpPr>
+            <a:spLocks noGrp="1"/>
+          </p:cNvSpPr>
+          <p:nvPr>
+            <p:ph type="sldNum" sz="quarter" idx="12"/>
+          </p:nvPr>
+        </p:nvSpPr>
+        <p:spPr>
+          <a:xfrm>
+            <a:off x="152400" y="4781550"/>
+            <a:ext cx="457200" cy="273844"/>
+          </a:xfrm>
+        </p:spPr>
+        <p:txBody>
+          <a:bodyPr/>
+          <a:lstStyle/>
+          <a:p>
+            <a:fld id="{B6F15528-21DE-4FAA-801E-634DDDAF4B2B}" type="slidenum">
+              <a:rPr lang="en-US" smtClean="0"/>
+              <a:pPr/>
+              <a:t>5</a:t>
+            </a:fld>
+            <a:endParaRPr lang="en-US" dirty="0"/>
+          </a:p>
+        </p:txBody>
+      </p:sp>
+      <p:sp>
+        <p:nvSpPr>
+          <p:cNvPr id="5" name="Title 4">
+            <a:extLst>
+              <a:ext uri="{FF2B5EF4-FFF2-40B4-BE49-F238E27FC236}">
+                <a16:creationId xmlns:a16="http://schemas.microsoft.com/office/drawing/2014/main" id="{73CD0C1D-D299-3852-9908-404039141507}"/>
+              </a:ext>
+            </a:extLst>
+          </p:cNvPr>
+          <p:cNvSpPr>
+            <a:spLocks noGrp="1"/>
+          </p:cNvSpPr>
+          <p:nvPr>
+            <p:ph type="title"/>
+          </p:nvPr>
+        </p:nvSpPr>
+        <p:spPr>
+          <a:xfrm>
+            <a:off x="76200" y="133350"/>
+            <a:ext cx="8229600" cy="533401"/>
+          </a:xfrm>
+        </p:spPr>
+        <p:txBody>
+          <a:bodyPr/>
+          <a:lstStyle/>
+          <a:p>
+            <a:r>
+              <a:rPr lang="en-IN" sz="2500" dirty="0">
+                <a:latin typeface="Cooper Black" panose="0208090404030B020404" pitchFamily="18" charset="0"/>
+              </a:rPr>
+              <a:t>Test data</a:t>
+            </a:r>
+          </a:p>
+        </p:txBody>
+      </p:sp>
+      <p:pic>
+        <p:nvPicPr>
+          <p:cNvPr id="7" name="Picture 6" descr="A bar code with numbers and letters&#10;&#10;AI-generated content may be incorrect.">
+            <a:extLst>
+              <a:ext uri="{FF2B5EF4-FFF2-40B4-BE49-F238E27FC236}">
+                <a16:creationId xmlns:a16="http://schemas.microsoft.com/office/drawing/2014/main" id="{7556EEE3-534B-1B06-A14F-6B9FC16C600D}"/>
+              </a:ext>
+            </a:extLst>
+          </p:cNvPr>
+          <p:cNvPicPr>
+            <a:picLocks noChangeAspect="1"/>
+          </p:cNvPicPr>
+          <p:nvPr/>
+        </p:nvPicPr>
+        <p:blipFill>
+          <a:blip r:embed="rId2">
+            <a:extLst>
+              <a:ext uri="{28A0092B-C50C-407E-A947-70E740481C1C}">
+                <a14:useLocalDpi xmlns:a14="http://schemas.microsoft.com/office/drawing/2010/main" val="0"/>
+              </a:ext>
+            </a:extLst>
+          </a:blip>
+          <a:stretch>
+            <a:fillRect/>
+          </a:stretch>
+        </p:blipFill>
+        <p:spPr>
+          <a:xfrm>
+            <a:off x="2819400" y="819150"/>
+            <a:ext cx="4581597" cy="3865381"/>
+          </a:xfrm>
+          <a:prstGeom prst="rect">
+            <a:avLst/>
+          </a:prstGeom>
+        </p:spPr>
+      </p:pic>
+      <p:pic>
+        <p:nvPicPr>
+          <p:cNvPr id="9" name="Picture 8" descr="A yellow circle with black letters and a black background&#10;&#10;AI-generated content may be incorrect.">
+            <a:extLst>
+              <a:ext uri="{FF2B5EF4-FFF2-40B4-BE49-F238E27FC236}">
+                <a16:creationId xmlns:a16="http://schemas.microsoft.com/office/drawing/2014/main" id="{31CCE318-4A30-F05D-613B-E2B8EC5C97C3}"/>
+              </a:ext>
+            </a:extLst>
+          </p:cNvPr>
+          <p:cNvPicPr>
+            <a:picLocks noChangeAspect="1"/>
+          </p:cNvPicPr>
+          <p:nvPr/>
+        </p:nvPicPr>
+        <p:blipFill>
+          <a:blip r:embed="rId3">
+            <a:alphaModFix amt="31000"/>
+            <a:extLst>
+              <a:ext uri="{28A0092B-C50C-407E-A947-70E740481C1C}">
+                <a14:useLocalDpi xmlns:a14="http://schemas.microsoft.com/office/drawing/2010/main" val="0"/>
+              </a:ext>
+            </a:extLst>
+          </a:blip>
+          <a:stretch>
+            <a:fillRect/>
+          </a:stretch>
+        </p:blipFill>
+        <p:spPr>
+          <a:xfrm>
+            <a:off x="3435626" y="1504950"/>
+            <a:ext cx="2590800" cy="2558946"/>
+          </a:xfrm>
+          <a:prstGeom prst="rect">
+            <a:avLst/>
+          </a:prstGeom>
+        </p:spPr>
+      </p:pic>
+    </p:spTree>
+    <p:extLst>
+      <p:ext uri="{BB962C8B-B14F-4D97-AF65-F5344CB8AC3E}">
+        <p14:creationId xmlns:p14="http://schemas.microsoft.com/office/powerpoint/2010/main" val="854278307"/>
+      </p:ext>
+    </p:extLst>
+  </p:cSld>
+  <p:clrMapOvr>
+    <a:masterClrMapping/>
+  </p:clrMapOvr>
+  <mc:AlternateContent xmlns:mc="http://schemas.openxmlformats.org/markup-compatibility/2006" xmlns:p14="http://schemas.microsoft.com/office/powerpoint/2010/main">
+    <mc:Choice Requires="p14">
+      <p:transition spd="med" p14:dur="700">
+        <p:fade/>
+      </p:transition>
+    </mc:Choice>
+    <mc:Fallback xmlns="">
+      <p:transition spd="med">
+        <p:fade/>
+      </p:transition>
+    </mc:Fallback>
+  </mc:AlternateContent>
+</p:sld>
+</file>
+
+<file path=ppt/slides/slide6.xml><?xml version="1.0" encoding="utf-8"?>
+<p:sld xmlns:a="http://schemas.openxmlformats.org/drawingml/2006/main" xmlns:r="http://schemas.openxmlformats.org/officeDocument/2006/relationships" xmlns:p="http://schemas.openxmlformats.org/presentationml/2006/main">
+  <p:cSld>
+    <p:spTree>
+      <p:nvGrpSpPr>
+        <p:cNvPr id="1" name=""/>
+        <p:cNvGrpSpPr/>
+        <p:nvPr/>
+      </p:nvGrpSpPr>
+      <p:grpSpPr>
+        <a:xfrm>
+          <a:off x="0" y="0"/>
+          <a:ext cx="0" cy="0"/>
+          <a:chOff x="0" y="0"/>
+          <a:chExt cx="0" cy="0"/>
+        </a:xfrm>
+      </p:grpSpPr>
+      <p:sp>
+        <p:nvSpPr>
+          <p:cNvPr id="3" name="Footer Placeholder 2">
+            <a:extLst>
+              <a:ext uri="{FF2B5EF4-FFF2-40B4-BE49-F238E27FC236}">
+                <a16:creationId xmlns:a16="http://schemas.microsoft.com/office/drawing/2014/main" id="{0AA6B50D-C015-5A7F-D1C3-D9688F56669F}"/>
+              </a:ext>
+            </a:extLst>
+          </p:cNvPr>
+          <p:cNvSpPr>
+            <a:spLocks noGrp="1"/>
+          </p:cNvSpPr>
+          <p:nvPr>
+            <p:ph type="ftr" sz="quarter" idx="11"/>
+          </p:nvPr>
+        </p:nvSpPr>
+        <p:spPr/>
+        <p:txBody>
+          <a:bodyPr/>
+          <a:lstStyle/>
+          <a:p>
+            <a:r>
+              <a:rPr lang="en-US"/>
+              <a:t>www.anubhavtrainings.com</a:t>
+            </a:r>
+            <a:endParaRPr lang="en-US" dirty="0"/>
+          </a:p>
+        </p:txBody>
+      </p:sp>
+      <p:sp>
+        <p:nvSpPr>
+          <p:cNvPr id="4" name="Slide Number Placeholder 3">
+            <a:extLst>
+              <a:ext uri="{FF2B5EF4-FFF2-40B4-BE49-F238E27FC236}">
+                <a16:creationId xmlns:a16="http://schemas.microsoft.com/office/drawing/2014/main" id="{AB3C1778-0EFA-B38E-BEDF-266B521FA3C0}"/>
+              </a:ext>
+            </a:extLst>
+          </p:cNvPr>
+          <p:cNvSpPr>
+            <a:spLocks noGrp="1"/>
+          </p:cNvSpPr>
+          <p:nvPr>
+            <p:ph type="sldNum" sz="quarter" idx="12"/>
+          </p:nvPr>
+        </p:nvSpPr>
+        <p:spPr/>
+        <p:txBody>
+          <a:bodyPr/>
+          <a:lstStyle/>
+          <a:p>
+            <a:fld id="{B6F15528-21DE-4FAA-801E-634DDDAF4B2B}" type="slidenum">
+              <a:rPr lang="en-US" smtClean="0"/>
+              <a:pPr/>
+              <a:t>6</a:t>
+            </a:fld>
+            <a:endParaRPr lang="en-US"/>
+          </a:p>
+        </p:txBody>
+      </p:sp>
+      <p:sp>
+        <p:nvSpPr>
+          <p:cNvPr id="5" name="Title 4">
+            <a:extLst>
+              <a:ext uri="{FF2B5EF4-FFF2-40B4-BE49-F238E27FC236}">
+                <a16:creationId xmlns:a16="http://schemas.microsoft.com/office/drawing/2014/main" id="{BCB8A0B7-C2FF-0295-0998-2A9661264922}"/>
+              </a:ext>
+            </a:extLst>
+          </p:cNvPr>
+          <p:cNvSpPr>
+            <a:spLocks noGrp="1"/>
+          </p:cNvSpPr>
+          <p:nvPr>
+            <p:ph type="title"/>
+          </p:nvPr>
+        </p:nvSpPr>
+        <p:spPr>
+          <a:xfrm>
+            <a:off x="304800" y="2954"/>
+            <a:ext cx="8229600" cy="533401"/>
+          </a:xfrm>
+        </p:spPr>
+        <p:txBody>
+          <a:bodyPr/>
+          <a:lstStyle/>
+          <a:p>
+            <a:r>
+              <a:rPr lang="en-IN" dirty="0">
+                <a:latin typeface="Cooper Black" panose="0208090404030B020404" pitchFamily="18" charset="0"/>
+              </a:rPr>
+              <a:t>SAP UI5 v/s SAP Build Apps</a:t>
+            </a:r>
+          </a:p>
+        </p:txBody>
+      </p:sp>
+      <p:graphicFrame>
+        <p:nvGraphicFramePr>
+          <p:cNvPr id="8" name="Table 7">
+            <a:extLst>
+              <a:ext uri="{FF2B5EF4-FFF2-40B4-BE49-F238E27FC236}">
+                <a16:creationId xmlns:a16="http://schemas.microsoft.com/office/drawing/2014/main" id="{BFCD893C-565B-E8FC-FA34-0345C315BA2B}"/>
+              </a:ext>
+            </a:extLst>
+          </p:cNvPr>
+          <p:cNvGraphicFramePr>
+            <a:graphicFrameLocks noGrp="1"/>
+          </p:cNvGraphicFramePr>
+          <p:nvPr/>
+        </p:nvGraphicFramePr>
+        <p:xfrm>
+          <a:off x="304800" y="549496"/>
+          <a:ext cx="8610600" cy="4299151"/>
+        </p:xfrm>
+        <a:graphic>
+          <a:graphicData uri="http://schemas.openxmlformats.org/drawingml/2006/table">
+            <a:tbl>
+              <a:tblPr>
+                <a:tableStyleId>{3C2FFA5D-87B4-456A-9821-1D502468CF0F}</a:tableStyleId>
+              </a:tblPr>
+              <a:tblGrid>
+                <a:gridCol w="2870200">
+                  <a:extLst>
+                    <a:ext uri="{9D8B030D-6E8A-4147-A177-3AD203B41FA5}">
+                      <a16:colId xmlns:a16="http://schemas.microsoft.com/office/drawing/2014/main" val="4269618366"/>
+                    </a:ext>
+                  </a:extLst>
+                </a:gridCol>
+                <a:gridCol w="2870200">
+                  <a:extLst>
+                    <a:ext uri="{9D8B030D-6E8A-4147-A177-3AD203B41FA5}">
+                      <a16:colId xmlns:a16="http://schemas.microsoft.com/office/drawing/2014/main" val="1145535638"/>
+                    </a:ext>
+                  </a:extLst>
+                </a:gridCol>
+                <a:gridCol w="2870200">
+                  <a:extLst>
+                    <a:ext uri="{9D8B030D-6E8A-4147-A177-3AD203B41FA5}">
+                      <a16:colId xmlns:a16="http://schemas.microsoft.com/office/drawing/2014/main" val="3975179690"/>
+                    </a:ext>
+                  </a:extLst>
+                </a:gridCol>
+              </a:tblGrid>
+              <a:tr h="91136">
+                <a:tc>
+                  <a:txBody>
+                    <a:bodyPr/>
+                    <a:lstStyle/>
+                    <a:p>
+                      <a:r>
+                        <a:rPr lang="en-IN" sz="1100" b="1" dirty="0"/>
+                        <a:t>Aspect</a:t>
+                      </a:r>
+                      <a:endParaRPr lang="en-IN" sz="1100" dirty="0"/>
+                    </a:p>
+                  </a:txBody>
+                  <a:tcPr marL="22784" marR="22784" marT="11392" marB="11392" anchor="ctr"/>
+                </a:tc>
+                <a:tc>
+                  <a:txBody>
+                    <a:bodyPr/>
+                    <a:lstStyle/>
+                    <a:p>
+                      <a:r>
+                        <a:rPr lang="en-IN" sz="1100" b="1"/>
+                        <a:t>SAP UI5</a:t>
+                      </a:r>
+                      <a:endParaRPr lang="en-IN" sz="1100"/>
+                    </a:p>
+                  </a:txBody>
+                  <a:tcPr marL="22784" marR="22784" marT="11392" marB="11392" anchor="ctr"/>
+                </a:tc>
+                <a:tc>
+                  <a:txBody>
+                    <a:bodyPr/>
+                    <a:lstStyle/>
+                    <a:p>
+                      <a:r>
+                        <a:rPr lang="en-IN" sz="1100" b="1"/>
+                        <a:t>SAP Build Apps</a:t>
+                      </a:r>
+                      <a:endParaRPr lang="en-IN" sz="1100"/>
+                    </a:p>
+                  </a:txBody>
+                  <a:tcPr marL="22784" marR="22784" marT="11392" marB="11392" anchor="ctr"/>
+                </a:tc>
+                <a:extLst>
+                  <a:ext uri="{0D108BD9-81ED-4DB2-BD59-A6C34878D82A}">
+                    <a16:rowId xmlns:a16="http://schemas.microsoft.com/office/drawing/2014/main" val="1078864104"/>
+                  </a:ext>
+                </a:extLst>
+              </a:tr>
+              <a:tr h="159489">
+                <a:tc>
+                  <a:txBody>
+                    <a:bodyPr/>
+                    <a:lstStyle/>
+                    <a:p>
+                      <a:r>
+                        <a:rPr lang="en-IN" sz="1000" b="1" dirty="0"/>
+                        <a:t>Development Approach</a:t>
+                      </a:r>
+                      <a:endParaRPr lang="en-IN" sz="1000" dirty="0"/>
+                    </a:p>
+                  </a:txBody>
+                  <a:tcPr marL="22784" marR="22784" marT="11392" marB="11392" anchor="ctr"/>
+                </a:tc>
+                <a:tc>
+                  <a:txBody>
+                    <a:bodyPr/>
+                    <a:lstStyle/>
+                    <a:p>
+                      <a:r>
+                        <a:rPr lang="en-US" sz="1000" dirty="0"/>
+                        <a:t>Full-code development (JavaScript, HTML, CSS)</a:t>
+                      </a:r>
+                    </a:p>
+                  </a:txBody>
+                  <a:tcPr marL="22784" marR="22784" marT="11392" marB="11392" anchor="ctr"/>
+                </a:tc>
+                <a:tc>
+                  <a:txBody>
+                    <a:bodyPr/>
+                    <a:lstStyle/>
+                    <a:p>
+                      <a:r>
+                        <a:rPr lang="en-US" sz="1000"/>
+                        <a:t>Low-code/no-code (drag-and-drop, minimal code)</a:t>
+                      </a:r>
+                    </a:p>
+                  </a:txBody>
+                  <a:tcPr marL="22784" marR="22784" marT="11392" marB="11392" anchor="ctr"/>
+                </a:tc>
+                <a:extLst>
+                  <a:ext uri="{0D108BD9-81ED-4DB2-BD59-A6C34878D82A}">
+                    <a16:rowId xmlns:a16="http://schemas.microsoft.com/office/drawing/2014/main" val="1971287169"/>
+                  </a:ext>
+                </a:extLst>
+              </a:tr>
+              <a:tr h="227841">
+                <a:tc>
+                  <a:txBody>
+                    <a:bodyPr/>
+                    <a:lstStyle/>
+                    <a:p>
+                      <a:r>
+                        <a:rPr lang="en-IN" sz="1000" b="1"/>
+                        <a:t>Target Audience</a:t>
+                      </a:r>
+                      <a:endParaRPr lang="en-IN" sz="1000"/>
+                    </a:p>
+                  </a:txBody>
+                  <a:tcPr marL="22784" marR="22784" marT="11392" marB="11392" anchor="ctr"/>
+                </a:tc>
+                <a:tc>
+                  <a:txBody>
+                    <a:bodyPr/>
+                    <a:lstStyle/>
+                    <a:p>
+                      <a:r>
+                        <a:rPr lang="en-IN" sz="1000"/>
+                        <a:t>Frontend developers, UI/UX designers, SAP developers</a:t>
+                      </a:r>
+                    </a:p>
+                  </a:txBody>
+                  <a:tcPr marL="22784" marR="22784" marT="11392" marB="11392" anchor="ctr"/>
+                </a:tc>
+                <a:tc>
+                  <a:txBody>
+                    <a:bodyPr/>
+                    <a:lstStyle/>
+                    <a:p>
+                      <a:r>
+                        <a:rPr lang="en-US" sz="1000"/>
+                        <a:t>Business users, citizen developers, IT teams</a:t>
+                      </a:r>
+                    </a:p>
+                  </a:txBody>
+                  <a:tcPr marL="22784" marR="22784" marT="11392" marB="11392" anchor="ctr"/>
+                </a:tc>
+                <a:extLst>
+                  <a:ext uri="{0D108BD9-81ED-4DB2-BD59-A6C34878D82A}">
+                    <a16:rowId xmlns:a16="http://schemas.microsoft.com/office/drawing/2014/main" val="524857799"/>
+                  </a:ext>
+                </a:extLst>
+              </a:tr>
+              <a:tr h="227841">
+                <a:tc>
+                  <a:txBody>
+                    <a:bodyPr/>
+                    <a:lstStyle/>
+                    <a:p>
+                      <a:r>
+                        <a:rPr lang="en-IN" sz="1000" b="1"/>
+                        <a:t>Customizability</a:t>
+                      </a:r>
+                      <a:endParaRPr lang="en-IN" sz="1000"/>
+                    </a:p>
+                  </a:txBody>
+                  <a:tcPr marL="22784" marR="22784" marT="11392" marB="11392" anchor="ctr"/>
+                </a:tc>
+                <a:tc>
+                  <a:txBody>
+                    <a:bodyPr/>
+                    <a:lstStyle/>
+                    <a:p>
+                      <a:r>
+                        <a:rPr lang="en-US" sz="1000" dirty="0"/>
+                        <a:t>Highly customizable, full control over design and logic</a:t>
+                      </a:r>
+                    </a:p>
+                  </a:txBody>
+                  <a:tcPr marL="22784" marR="22784" marT="11392" marB="11392" anchor="ctr"/>
+                </a:tc>
+                <a:tc>
+                  <a:txBody>
+                    <a:bodyPr/>
+                    <a:lstStyle/>
+                    <a:p>
+                      <a:r>
+                        <a:rPr lang="en-US" sz="1000"/>
+                        <a:t>Flexible with limits; customization possible with code</a:t>
+                      </a:r>
+                    </a:p>
+                  </a:txBody>
+                  <a:tcPr marL="22784" marR="22784" marT="11392" marB="11392" anchor="ctr"/>
+                </a:tc>
+                <a:extLst>
+                  <a:ext uri="{0D108BD9-81ED-4DB2-BD59-A6C34878D82A}">
+                    <a16:rowId xmlns:a16="http://schemas.microsoft.com/office/drawing/2014/main" val="216765501"/>
+                  </a:ext>
+                </a:extLst>
+              </a:tr>
+              <a:tr h="159489">
+                <a:tc>
+                  <a:txBody>
+                    <a:bodyPr/>
+                    <a:lstStyle/>
+                    <a:p>
+                      <a:r>
+                        <a:rPr lang="en-IN" sz="1000" b="1"/>
+                        <a:t>Ease of Use</a:t>
+                      </a:r>
+                      <a:endParaRPr lang="en-IN" sz="1000"/>
+                    </a:p>
+                  </a:txBody>
+                  <a:tcPr marL="22784" marR="22784" marT="11392" marB="11392" anchor="ctr"/>
+                </a:tc>
+                <a:tc>
+                  <a:txBody>
+                    <a:bodyPr/>
+                    <a:lstStyle/>
+                    <a:p>
+                      <a:r>
+                        <a:rPr lang="en-IN" sz="1000"/>
+                        <a:t>Requires programming knowledge (JavaScript)</a:t>
+                      </a:r>
+                    </a:p>
+                  </a:txBody>
+                  <a:tcPr marL="22784" marR="22784" marT="11392" marB="11392" anchor="ctr"/>
+                </a:tc>
+                <a:tc>
+                  <a:txBody>
+                    <a:bodyPr/>
+                    <a:lstStyle/>
+                    <a:p>
+                      <a:r>
+                        <a:rPr lang="en-US" sz="1000" dirty="0"/>
+                        <a:t>Very user-friendly, no/less programming required</a:t>
+                      </a:r>
+                    </a:p>
+                  </a:txBody>
+                  <a:tcPr marL="22784" marR="22784" marT="11392" marB="11392" anchor="ctr"/>
+                </a:tc>
+                <a:extLst>
+                  <a:ext uri="{0D108BD9-81ED-4DB2-BD59-A6C34878D82A}">
+                    <a16:rowId xmlns:a16="http://schemas.microsoft.com/office/drawing/2014/main" val="1344627193"/>
+                  </a:ext>
+                </a:extLst>
+              </a:tr>
+              <a:tr h="227841">
+                <a:tc>
+                  <a:txBody>
+                    <a:bodyPr/>
+                    <a:lstStyle/>
+                    <a:p>
+                      <a:r>
+                        <a:rPr lang="en-IN" sz="1000" b="1"/>
+                        <a:t>Platform Type</a:t>
+                      </a:r>
+                      <a:endParaRPr lang="en-IN" sz="1000"/>
+                    </a:p>
+                  </a:txBody>
+                  <a:tcPr marL="22784" marR="22784" marT="11392" marB="11392" anchor="ctr"/>
+                </a:tc>
+                <a:tc>
+                  <a:txBody>
+                    <a:bodyPr/>
+                    <a:lstStyle/>
+                    <a:p>
+                      <a:r>
+                        <a:rPr lang="en-US" sz="1000" dirty="0"/>
+                        <a:t>UI framework for building custom web apps, Suitable for both cloud and on-premise apps</a:t>
+                      </a:r>
+                    </a:p>
+                  </a:txBody>
+                  <a:tcPr marL="22784" marR="22784" marT="11392" marB="11392" anchor="ctr"/>
+                </a:tc>
+                <a:tc>
+                  <a:txBody>
+                    <a:bodyPr/>
+                    <a:lstStyle/>
+                    <a:p>
+                      <a:r>
+                        <a:rPr lang="en-US" sz="1000" dirty="0"/>
+                        <a:t>Low-code platform for full app development (web, mobile) suitable for cloud and native apps</a:t>
+                      </a:r>
+                    </a:p>
+                  </a:txBody>
+                  <a:tcPr marL="22784" marR="22784" marT="11392" marB="11392" anchor="ctr"/>
+                </a:tc>
+                <a:extLst>
+                  <a:ext uri="{0D108BD9-81ED-4DB2-BD59-A6C34878D82A}">
+                    <a16:rowId xmlns:a16="http://schemas.microsoft.com/office/drawing/2014/main" val="3277582465"/>
+                  </a:ext>
+                </a:extLst>
+              </a:tr>
+              <a:tr h="227841">
+                <a:tc>
+                  <a:txBody>
+                    <a:bodyPr/>
+                    <a:lstStyle/>
+                    <a:p>
+                      <a:r>
+                        <a:rPr lang="en-IN" sz="1000" b="1" dirty="0"/>
+                        <a:t>APK support</a:t>
+                      </a:r>
+                      <a:endParaRPr lang="en-IN" sz="1000" dirty="0"/>
+                    </a:p>
+                  </a:txBody>
+                  <a:tcPr marL="22784" marR="22784" marT="11392" marB="11392" anchor="ctr"/>
+                </a:tc>
+                <a:tc>
+                  <a:txBody>
+                    <a:bodyPr/>
+                    <a:lstStyle/>
+                    <a:p>
+                      <a:r>
+                        <a:rPr lang="en-US" sz="1000" dirty="0"/>
+                        <a:t>Using Cordova plugin</a:t>
+                      </a:r>
+                    </a:p>
+                  </a:txBody>
+                  <a:tcPr marL="22784" marR="22784" marT="11392" marB="11392" anchor="ctr"/>
+                </a:tc>
+                <a:tc>
+                  <a:txBody>
+                    <a:bodyPr/>
+                    <a:lstStyle/>
+                    <a:p>
+                      <a:r>
+                        <a:rPr lang="en-US" sz="1000" dirty="0"/>
+                        <a:t>Direct support to extract the APK</a:t>
+                      </a:r>
+                    </a:p>
+                  </a:txBody>
+                  <a:tcPr marL="22784" marR="22784" marT="11392" marB="11392" anchor="ctr"/>
+                </a:tc>
+                <a:extLst>
+                  <a:ext uri="{0D108BD9-81ED-4DB2-BD59-A6C34878D82A}">
+                    <a16:rowId xmlns:a16="http://schemas.microsoft.com/office/drawing/2014/main" val="1176057960"/>
+                  </a:ext>
+                </a:extLst>
+              </a:tr>
+              <a:tr h="227841">
+                <a:tc>
+                  <a:txBody>
+                    <a:bodyPr/>
+                    <a:lstStyle/>
+                    <a:p>
+                      <a:r>
+                        <a:rPr lang="en-IN" sz="1000" b="1" dirty="0"/>
+                        <a:t>UI Components</a:t>
+                      </a:r>
+                      <a:endParaRPr lang="en-IN" sz="1000" dirty="0"/>
+                    </a:p>
+                  </a:txBody>
+                  <a:tcPr marL="22784" marR="22784" marT="11392" marB="11392" anchor="ctr"/>
+                </a:tc>
+                <a:tc>
+                  <a:txBody>
+                    <a:bodyPr/>
+                    <a:lstStyle/>
+                    <a:p>
+                      <a:r>
+                        <a:rPr lang="en-IN" sz="1000"/>
+                        <a:t>Advanced, enterprise-grade UI components</a:t>
+                      </a:r>
+                    </a:p>
+                  </a:txBody>
+                  <a:tcPr marL="22784" marR="22784" marT="11392" marB="11392" anchor="ctr"/>
+                </a:tc>
+                <a:tc>
+                  <a:txBody>
+                    <a:bodyPr/>
+                    <a:lstStyle/>
+                    <a:p>
+                      <a:r>
+                        <a:rPr lang="en-US" sz="1000" dirty="0"/>
+                        <a:t>Pre-built, basic UI components for rapid development</a:t>
+                      </a:r>
+                    </a:p>
+                  </a:txBody>
+                  <a:tcPr marL="22784" marR="22784" marT="11392" marB="11392" anchor="ctr"/>
+                </a:tc>
+                <a:extLst>
+                  <a:ext uri="{0D108BD9-81ED-4DB2-BD59-A6C34878D82A}">
+                    <a16:rowId xmlns:a16="http://schemas.microsoft.com/office/drawing/2014/main" val="1414030629"/>
+                  </a:ext>
+                </a:extLst>
+              </a:tr>
+              <a:tr h="227841">
+                <a:tc>
+                  <a:txBody>
+                    <a:bodyPr/>
+                    <a:lstStyle/>
+                    <a:p>
+                      <a:r>
+                        <a:rPr lang="en-IN" sz="1000" b="1" dirty="0"/>
+                        <a:t>Integration with SAP Systems</a:t>
+                      </a:r>
+                      <a:endParaRPr lang="en-IN" sz="1000" dirty="0"/>
+                    </a:p>
+                  </a:txBody>
+                  <a:tcPr marL="22784" marR="22784" marT="11392" marB="11392" anchor="ctr"/>
+                </a:tc>
+                <a:tc>
+                  <a:txBody>
+                    <a:bodyPr/>
+                    <a:lstStyle/>
+                    <a:p>
+                      <a:r>
+                        <a:rPr lang="en-US" sz="1000" dirty="0"/>
+                        <a:t>Seamless integration with SAP backend (S/4HANA, Fiori, etc.)</a:t>
+                      </a:r>
+                    </a:p>
+                  </a:txBody>
+                  <a:tcPr marL="22784" marR="22784" marT="11392" marB="11392" anchor="ctr"/>
+                </a:tc>
+                <a:tc>
+                  <a:txBody>
+                    <a:bodyPr/>
+                    <a:lstStyle/>
+                    <a:p>
+                      <a:r>
+                        <a:rPr lang="en-US" sz="1000"/>
+                        <a:t>Integrates with SAP and non-SAP systems via APIs</a:t>
+                      </a:r>
+                    </a:p>
+                  </a:txBody>
+                  <a:tcPr marL="22784" marR="22784" marT="11392" marB="11392" anchor="ctr"/>
+                </a:tc>
+                <a:extLst>
+                  <a:ext uri="{0D108BD9-81ED-4DB2-BD59-A6C34878D82A}">
+                    <a16:rowId xmlns:a16="http://schemas.microsoft.com/office/drawing/2014/main" val="1765653281"/>
+                  </a:ext>
+                </a:extLst>
+              </a:tr>
+              <a:tr h="159489">
+                <a:tc>
+                  <a:txBody>
+                    <a:bodyPr/>
+                    <a:lstStyle/>
+                    <a:p>
+                      <a:r>
+                        <a:rPr lang="en-IN" sz="1000" b="1" dirty="0"/>
+                        <a:t>Integration with Third-Party Systems</a:t>
+                      </a:r>
+                      <a:endParaRPr lang="en-IN" sz="1000" dirty="0"/>
+                    </a:p>
+                  </a:txBody>
+                  <a:tcPr marL="22784" marR="22784" marT="11392" marB="11392" anchor="ctr"/>
+                </a:tc>
+                <a:tc>
+                  <a:txBody>
+                    <a:bodyPr/>
+                    <a:lstStyle/>
+                    <a:p>
+                      <a:r>
+                        <a:rPr lang="en-IN" sz="1000" dirty="0"/>
+                        <a:t>Typically requires custom development</a:t>
+                      </a:r>
+                    </a:p>
+                  </a:txBody>
+                  <a:tcPr marL="22784" marR="22784" marT="11392" marB="11392" anchor="ctr"/>
+                </a:tc>
+                <a:tc>
+                  <a:txBody>
+                    <a:bodyPr/>
+                    <a:lstStyle/>
+                    <a:p>
+                      <a:r>
+                        <a:rPr lang="en-US" sz="1000"/>
+                        <a:t>Easy integration with third-party systems via APIs</a:t>
+                      </a:r>
+                    </a:p>
+                  </a:txBody>
+                  <a:tcPr marL="22784" marR="22784" marT="11392" marB="11392" anchor="ctr"/>
+                </a:tc>
+                <a:extLst>
+                  <a:ext uri="{0D108BD9-81ED-4DB2-BD59-A6C34878D82A}">
+                    <a16:rowId xmlns:a16="http://schemas.microsoft.com/office/drawing/2014/main" val="3474205117"/>
+                  </a:ext>
+                </a:extLst>
+              </a:tr>
+              <a:tr h="227841">
+                <a:tc>
+                  <a:txBody>
+                    <a:bodyPr/>
+                    <a:lstStyle/>
+                    <a:p>
+                      <a:r>
+                        <a:rPr lang="en-IN" sz="1000" b="1" dirty="0"/>
+                        <a:t>Flexibility in Design</a:t>
+                      </a:r>
+                      <a:endParaRPr lang="en-IN" sz="1000" dirty="0"/>
+                    </a:p>
+                  </a:txBody>
+                  <a:tcPr marL="22784" marR="22784" marT="11392" marB="11392" anchor="ctr"/>
+                </a:tc>
+                <a:tc>
+                  <a:txBody>
+                    <a:bodyPr/>
+                    <a:lstStyle/>
+                    <a:p>
+                      <a:r>
+                        <a:rPr lang="en-US" sz="1000" dirty="0"/>
+                        <a:t>Full flexibility for custom designs and behaviors</a:t>
+                      </a:r>
+                    </a:p>
+                  </a:txBody>
+                  <a:tcPr marL="22784" marR="22784" marT="11392" marB="11392" anchor="ctr"/>
+                </a:tc>
+                <a:tc>
+                  <a:txBody>
+                    <a:bodyPr/>
+                    <a:lstStyle/>
+                    <a:p>
+                      <a:r>
+                        <a:rPr lang="en-US" sz="1000"/>
+                        <a:t>Limited flexibility compared to full coding, but extensible with logic</a:t>
+                      </a:r>
+                    </a:p>
+                  </a:txBody>
+                  <a:tcPr marL="22784" marR="22784" marT="11392" marB="11392" anchor="ctr"/>
+                </a:tc>
+                <a:extLst>
+                  <a:ext uri="{0D108BD9-81ED-4DB2-BD59-A6C34878D82A}">
+                    <a16:rowId xmlns:a16="http://schemas.microsoft.com/office/drawing/2014/main" val="1799076693"/>
+                  </a:ext>
+                </a:extLst>
+              </a:tr>
+              <a:tr h="159489">
+                <a:tc>
+                  <a:txBody>
+                    <a:bodyPr/>
+                    <a:lstStyle/>
+                    <a:p>
+                      <a:r>
+                        <a:rPr lang="en-IN" sz="1000" b="1" dirty="0"/>
+                        <a:t>Complexity</a:t>
+                      </a:r>
+                      <a:endParaRPr lang="en-IN" sz="1000" dirty="0"/>
+                    </a:p>
+                  </a:txBody>
+                  <a:tcPr marL="22784" marR="22784" marT="11392" marB="11392" anchor="ctr"/>
+                </a:tc>
+                <a:tc>
+                  <a:txBody>
+                    <a:bodyPr/>
+                    <a:lstStyle/>
+                    <a:p>
+                      <a:r>
+                        <a:rPr lang="en-US" sz="1000" dirty="0"/>
+                        <a:t>High, requires technical knowledge and expertise</a:t>
+                      </a:r>
+                    </a:p>
+                  </a:txBody>
+                  <a:tcPr marL="22784" marR="22784" marT="11392" marB="11392" anchor="ctr"/>
+                </a:tc>
+                <a:tc>
+                  <a:txBody>
+                    <a:bodyPr/>
+                    <a:lstStyle/>
+                    <a:p>
+                      <a:r>
+                        <a:rPr lang="en-US" sz="1000"/>
+                        <a:t>Low, accessible for non-technical users</a:t>
+                      </a:r>
+                    </a:p>
+                  </a:txBody>
+                  <a:tcPr marL="22784" marR="22784" marT="11392" marB="11392" anchor="ctr"/>
+                </a:tc>
+                <a:extLst>
+                  <a:ext uri="{0D108BD9-81ED-4DB2-BD59-A6C34878D82A}">
+                    <a16:rowId xmlns:a16="http://schemas.microsoft.com/office/drawing/2014/main" val="2320841512"/>
+                  </a:ext>
+                </a:extLst>
+              </a:tr>
+              <a:tr h="227841">
+                <a:tc>
+                  <a:txBody>
+                    <a:bodyPr/>
+                    <a:lstStyle/>
+                    <a:p>
+                      <a:r>
+                        <a:rPr lang="en-IN" sz="1000" b="1" dirty="0"/>
+                        <a:t>Speed of Development</a:t>
+                      </a:r>
+                      <a:endParaRPr lang="en-IN" sz="1000" dirty="0"/>
+                    </a:p>
+                  </a:txBody>
+                  <a:tcPr marL="22784" marR="22784" marT="11392" marB="11392" anchor="ctr"/>
+                </a:tc>
+                <a:tc>
+                  <a:txBody>
+                    <a:bodyPr/>
+                    <a:lstStyle/>
+                    <a:p>
+                      <a:r>
+                        <a:rPr lang="en-US" sz="1000"/>
+                        <a:t>Slower, due to custom coding and in-depth UI design</a:t>
+                      </a:r>
+                    </a:p>
+                  </a:txBody>
+                  <a:tcPr marL="22784" marR="22784" marT="11392" marB="11392" anchor="ctr"/>
+                </a:tc>
+                <a:tc>
+                  <a:txBody>
+                    <a:bodyPr/>
+                    <a:lstStyle/>
+                    <a:p>
+                      <a:r>
+                        <a:rPr lang="en-US" sz="1000" dirty="0"/>
+                        <a:t>Faster, thanks to low-code/no-code approach</a:t>
+                      </a:r>
+                    </a:p>
+                  </a:txBody>
+                  <a:tcPr marL="22784" marR="22784" marT="11392" marB="11392" anchor="ctr"/>
+                </a:tc>
+                <a:extLst>
+                  <a:ext uri="{0D108BD9-81ED-4DB2-BD59-A6C34878D82A}">
+                    <a16:rowId xmlns:a16="http://schemas.microsoft.com/office/drawing/2014/main" val="433042983"/>
+                  </a:ext>
+                </a:extLst>
+              </a:tr>
+              <a:tr h="227841">
+                <a:tc>
+                  <a:txBody>
+                    <a:bodyPr/>
+                    <a:lstStyle/>
+                    <a:p>
+                      <a:r>
+                        <a:rPr lang="en-IN" sz="1000" b="1" dirty="0"/>
+                        <a:t>Cost</a:t>
+                      </a:r>
+                      <a:endParaRPr lang="en-IN" sz="1000" dirty="0"/>
+                    </a:p>
+                  </a:txBody>
+                  <a:tcPr marL="22784" marR="22784" marT="11392" marB="11392" anchor="ctr"/>
+                </a:tc>
+                <a:tc>
+                  <a:txBody>
+                    <a:bodyPr/>
+                    <a:lstStyle/>
+                    <a:p>
+                      <a:r>
+                        <a:rPr lang="en-US" sz="1000" dirty="0"/>
+                        <a:t>High</a:t>
+                      </a:r>
+                    </a:p>
+                  </a:txBody>
+                  <a:tcPr marL="22784" marR="22784" marT="11392" marB="11392" anchor="ctr"/>
+                </a:tc>
+                <a:tc>
+                  <a:txBody>
+                    <a:bodyPr/>
+                    <a:lstStyle/>
+                    <a:p>
+                      <a:r>
+                        <a:rPr lang="en-US" sz="1000" dirty="0"/>
+                        <a:t>Less</a:t>
+                      </a:r>
+                    </a:p>
+                  </a:txBody>
+                  <a:tcPr marL="22784" marR="22784" marT="11392" marB="11392" anchor="ctr"/>
+                </a:tc>
+                <a:extLst>
+                  <a:ext uri="{0D108BD9-81ED-4DB2-BD59-A6C34878D82A}">
+                    <a16:rowId xmlns:a16="http://schemas.microsoft.com/office/drawing/2014/main" val="64431186"/>
+                  </a:ext>
+                </a:extLst>
+              </a:tr>
+              <a:tr h="227841">
+                <a:tc>
+                  <a:txBody>
+                    <a:bodyPr/>
+                    <a:lstStyle/>
+                    <a:p>
+                      <a:r>
+                        <a:rPr lang="en-IN" sz="1000" b="1"/>
+                        <a:t>Use Case</a:t>
+                      </a:r>
+                      <a:endParaRPr lang="en-IN" sz="1000"/>
+                    </a:p>
+                  </a:txBody>
+                  <a:tcPr marL="22784" marR="22784" marT="11392" marB="11392" anchor="ctr"/>
+                </a:tc>
+                <a:tc>
+                  <a:txBody>
+                    <a:bodyPr/>
+                    <a:lstStyle/>
+                    <a:p>
+                      <a:r>
+                        <a:rPr lang="en-US" sz="1000"/>
+                        <a:t>Custom, enterprise-level applications with detailed UI</a:t>
+                      </a:r>
+                    </a:p>
+                  </a:txBody>
+                  <a:tcPr marL="22784" marR="22784" marT="11392" marB="11392" anchor="ctr"/>
+                </a:tc>
+                <a:tc>
+                  <a:txBody>
+                    <a:bodyPr/>
+                    <a:lstStyle/>
+                    <a:p>
+                      <a:r>
+                        <a:rPr lang="en-US" sz="1000" dirty="0"/>
+                        <a:t>Rapid prototyping and app development for business needs</a:t>
+                      </a:r>
+                    </a:p>
+                  </a:txBody>
+                  <a:tcPr marL="22784" marR="22784" marT="11392" marB="11392" anchor="ctr"/>
+                </a:tc>
+                <a:extLst>
+                  <a:ext uri="{0D108BD9-81ED-4DB2-BD59-A6C34878D82A}">
+                    <a16:rowId xmlns:a16="http://schemas.microsoft.com/office/drawing/2014/main" val="4275600967"/>
+                  </a:ext>
+                </a:extLst>
+              </a:tr>
+              <a:tr h="227841">
+                <a:tc>
+                  <a:txBody>
+                    <a:bodyPr/>
+                    <a:lstStyle/>
+                    <a:p>
+                      <a:r>
+                        <a:rPr lang="en-IN" sz="1000" b="1"/>
+                        <a:t>Extensibility</a:t>
+                      </a:r>
+                      <a:endParaRPr lang="en-IN" sz="1000"/>
+                    </a:p>
+                  </a:txBody>
+                  <a:tcPr marL="22784" marR="22784" marT="11392" marB="11392" anchor="ctr"/>
+                </a:tc>
+                <a:tc>
+                  <a:txBody>
+                    <a:bodyPr/>
+                    <a:lstStyle/>
+                    <a:p>
+                      <a:r>
+                        <a:rPr lang="en-US" sz="1000"/>
+                        <a:t>Fully extensible with custom code</a:t>
+                      </a:r>
+                    </a:p>
+                  </a:txBody>
+                  <a:tcPr marL="22784" marR="22784" marT="11392" marB="11392" anchor="ctr"/>
+                </a:tc>
+                <a:tc>
+                  <a:txBody>
+                    <a:bodyPr/>
+                    <a:lstStyle/>
+                    <a:p>
+                      <a:r>
+                        <a:rPr lang="en-US" sz="1000" dirty="0"/>
+                        <a:t>Extensible with custom code but within a low-code environment</a:t>
+                      </a:r>
+                    </a:p>
+                  </a:txBody>
+                  <a:tcPr marL="22784" marR="22784" marT="11392" marB="11392" anchor="ctr"/>
+                </a:tc>
+                <a:extLst>
+                  <a:ext uri="{0D108BD9-81ED-4DB2-BD59-A6C34878D82A}">
+                    <a16:rowId xmlns:a16="http://schemas.microsoft.com/office/drawing/2014/main" val="3693689815"/>
+                  </a:ext>
+                </a:extLst>
+              </a:tr>
+              <a:tr h="227841">
+                <a:tc>
+                  <a:txBody>
+                    <a:bodyPr/>
+                    <a:lstStyle/>
+                    <a:p>
+                      <a:r>
+                        <a:rPr lang="en-IN" sz="1000" b="1"/>
+                        <a:t>Maintenance</a:t>
+                      </a:r>
+                      <a:endParaRPr lang="en-IN" sz="1000"/>
+                    </a:p>
+                  </a:txBody>
+                  <a:tcPr marL="22784" marR="22784" marT="11392" marB="11392" anchor="ctr"/>
+                </a:tc>
+                <a:tc>
+                  <a:txBody>
+                    <a:bodyPr/>
+                    <a:lstStyle/>
+                    <a:p>
+                      <a:r>
+                        <a:rPr lang="en-US" sz="1000"/>
+                        <a:t>Requires ongoing developer involvement for updates</a:t>
+                      </a:r>
+                    </a:p>
+                  </a:txBody>
+                  <a:tcPr marL="22784" marR="22784" marT="11392" marB="11392" anchor="ctr"/>
+                </a:tc>
+                <a:tc>
+                  <a:txBody>
+                    <a:bodyPr/>
+                    <a:lstStyle/>
+                    <a:p>
+                      <a:r>
+                        <a:rPr lang="en-US" sz="1000" dirty="0"/>
+                        <a:t>Easier to maintain, especially for non-technical teams</a:t>
+                      </a:r>
+                    </a:p>
+                  </a:txBody>
+                  <a:tcPr marL="22784" marR="22784" marT="11392" marB="11392" anchor="ctr"/>
+                </a:tc>
+                <a:extLst>
+                  <a:ext uri="{0D108BD9-81ED-4DB2-BD59-A6C34878D82A}">
+                    <a16:rowId xmlns:a16="http://schemas.microsoft.com/office/drawing/2014/main" val="1177527492"/>
+                  </a:ext>
+                </a:extLst>
+              </a:tr>
+              <a:tr h="159489">
+                <a:tc>
+                  <a:txBody>
+                    <a:bodyPr/>
+                    <a:lstStyle/>
+                    <a:p>
+                      <a:r>
+                        <a:rPr lang="en-IN" sz="1000" b="1"/>
+                        <a:t>Learning Curve</a:t>
+                      </a:r>
+                      <a:endParaRPr lang="en-IN" sz="1000"/>
+                    </a:p>
+                  </a:txBody>
+                  <a:tcPr marL="22784" marR="22784" marT="11392" marB="11392" anchor="ctr"/>
+                </a:tc>
+                <a:tc>
+                  <a:txBody>
+                    <a:bodyPr/>
+                    <a:lstStyle/>
+                    <a:p>
+                      <a:r>
+                        <a:rPr lang="en-US" sz="1000"/>
+                        <a:t>Steep learning curve for developers</a:t>
+                      </a:r>
+                    </a:p>
+                  </a:txBody>
+                  <a:tcPr marL="22784" marR="22784" marT="11392" marB="11392" anchor="ctr"/>
+                </a:tc>
+                <a:tc>
+                  <a:txBody>
+                    <a:bodyPr/>
+                    <a:lstStyle/>
+                    <a:p>
+                      <a:r>
+                        <a:rPr lang="en-US" sz="1000" dirty="0"/>
+                        <a:t>Low learning curve for non-technical users</a:t>
+                      </a:r>
+                    </a:p>
+                  </a:txBody>
+                  <a:tcPr marL="22784" marR="22784" marT="11392" marB="11392" anchor="ctr"/>
+                </a:tc>
+                <a:extLst>
+                  <a:ext uri="{0D108BD9-81ED-4DB2-BD59-A6C34878D82A}">
+                    <a16:rowId xmlns:a16="http://schemas.microsoft.com/office/drawing/2014/main" val="848069698"/>
+                  </a:ext>
+                </a:extLst>
+              </a:tr>
+            </a:tbl>
+          </a:graphicData>
+        </a:graphic>
+      </p:graphicFrame>
+    </p:spTree>
+    <p:extLst>
+      <p:ext uri="{BB962C8B-B14F-4D97-AF65-F5344CB8AC3E}">
+        <p14:creationId xmlns:p14="http://schemas.microsoft.com/office/powerpoint/2010/main" val="2618559557"/>
+      </p:ext>
+    </p:extLst>
+  </p:cSld>
+  <p:clrMapOvr>
+    <a:masterClrMapping/>
+  </p:clrMapOvr>
+</p:sld>
+</file>
+
+<file path=ppt/slides/slide7.xml><?xml version="1.0" encoding="utf-8"?>
+<p:sld xmlns:a="http://schemas.openxmlformats.org/drawingml/2006/main" xmlns:r="http://schemas.openxmlformats.org/officeDocument/2006/relationships" xmlns:p="http://schemas.openxmlformats.org/presentationml/2006/main">
+  <p:cSld>
+    <p:spTree>
+      <p:nvGrpSpPr>
+        <p:cNvPr id="1" name="">
+          <a:extLst>
+            <a:ext uri="{FF2B5EF4-FFF2-40B4-BE49-F238E27FC236}">
               <a16:creationId xmlns:a16="http://schemas.microsoft.com/office/drawing/2014/main" id="{45D267E1-D0D6-2AEF-4CBD-3FB5C659320A}"/>
             </a:ext>
           </a:extLst>
@@ -14046,7 +15778,7 @@
             <a:fld id="{B6F15528-21DE-4FAA-801E-634DDDAF4B2B}" type="slidenum">
               <a:rPr lang="en-US" smtClean="0"/>
               <a:pPr/>
-              <a:t>5</a:t>
+              <a:t>7</a:t>
             </a:fld>
             <a:endParaRPr lang="en-US" dirty="0"/>
           </a:p>
@@ -14407,7 +16139,7 @@
 </p:sld>
 </file>
 
-<file path=ppt/slides/slide6.xml><?xml version="1.0" encoding="utf-8"?>
+<file path=ppt/slides/slide8.xml><?xml version="1.0" encoding="utf-8"?>
 <p:sld xmlns:a="http://schemas.openxmlformats.org/drawingml/2006/main" xmlns:r="http://schemas.openxmlformats.org/officeDocument/2006/relationships" xmlns:p="http://schemas.openxmlformats.org/presentationml/2006/main">
   <p:cSld>
     <p:spTree>
@@ -14488,7 +16220,7 @@
             <a:fld id="{B6F15528-21DE-4FAA-801E-634DDDAF4B2B}" type="slidenum">
               <a:rPr lang="en-US" smtClean="0"/>
               <a:pPr/>
-              <a:t>6</a:t>
+              <a:t>8</a:t>
             </a:fld>
             <a:endParaRPr lang="en-US" dirty="0"/>
           </a:p>
@@ -14794,7 +16526,7 @@
 </p:sld>
 </file>
 
-<file path=ppt/slides/slide7.xml><?xml version="1.0" encoding="utf-8"?>
+<file path=ppt/slides/slide9.xml><?xml version="1.0" encoding="utf-8"?>
 <p:sld xmlns:a="http://schemas.openxmlformats.org/drawingml/2006/main" xmlns:r="http://schemas.openxmlformats.org/officeDocument/2006/relationships" xmlns:p="http://schemas.openxmlformats.org/presentationml/2006/main">
   <p:cSld>
     <p:spTree>
@@ -14874,7 +16606,7 @@
             <a:fld id="{B6F15528-21DE-4FAA-801E-634DDDAF4B2B}" type="slidenum">
               <a:rPr lang="en-US" smtClean="0"/>
               <a:pPr/>
-              <a:t>7</a:t>
+              <a:t>9</a:t>
             </a:fld>
             <a:endParaRPr lang="en-US" dirty="0"/>
           </a:p>
@@ -15138,494 +16870,6 @@
     <p:extLst>
       <p:ext uri="{BB962C8B-B14F-4D97-AF65-F5344CB8AC3E}">
         <p14:creationId xmlns:p14="http://schemas.microsoft.com/office/powerpoint/2010/main" val="2190051540"/>
-      </p:ext>
-    </p:extLst>
-  </p:cSld>
-  <p:clrMapOvr>
-    <a:masterClrMapping/>
-  </p:clrMapOvr>
-  <mc:AlternateContent xmlns:mc="http://schemas.openxmlformats.org/markup-compatibility/2006" xmlns:p14="http://schemas.microsoft.com/office/powerpoint/2010/main">
-    <mc:Choice Requires="p14">
-      <p:transition spd="med" p14:dur="700">
-        <p:fade/>
-      </p:transition>
-    </mc:Choice>
-    <mc:Fallback xmlns="">
-      <p:transition spd="med">
-        <p:fade/>
-      </p:transition>
-    </mc:Fallback>
-  </mc:AlternateContent>
-</p:sld>
-</file>
-
-<file path=ppt/slides/slide8.xml><?xml version="1.0" encoding="utf-8"?>
-<p:sld xmlns:a="http://schemas.openxmlformats.org/drawingml/2006/main" xmlns:r="http://schemas.openxmlformats.org/officeDocument/2006/relationships" xmlns:p="http://schemas.openxmlformats.org/presentationml/2006/main">
-  <p:cSld>
-    <p:spTree>
-      <p:nvGrpSpPr>
-        <p:cNvPr id="1" name="">
-          <a:extLst>
-            <a:ext uri="{FF2B5EF4-FFF2-40B4-BE49-F238E27FC236}">
-              <a16:creationId xmlns:a16="http://schemas.microsoft.com/office/drawing/2014/main" id="{0A03BCA9-CFCD-597D-1DAB-C01F7566B41A}"/>
-            </a:ext>
-          </a:extLst>
-        </p:cNvPr>
-        <p:cNvGrpSpPr/>
-        <p:nvPr/>
-      </p:nvGrpSpPr>
-      <p:grpSpPr>
-        <a:xfrm>
-          <a:off x="0" y="0"/>
-          <a:ext cx="0" cy="0"/>
-          <a:chOff x="0" y="0"/>
-          <a:chExt cx="0" cy="0"/>
-        </a:xfrm>
-      </p:grpSpPr>
-      <p:sp>
-        <p:nvSpPr>
-          <p:cNvPr id="3" name="Footer Placeholder 2">
-            <a:extLst>
-              <a:ext uri="{FF2B5EF4-FFF2-40B4-BE49-F238E27FC236}">
-                <a16:creationId xmlns:a16="http://schemas.microsoft.com/office/drawing/2014/main" id="{9C1BF838-FFA3-8D49-497D-77D5661D7025}"/>
-              </a:ext>
-            </a:extLst>
-          </p:cNvPr>
-          <p:cNvSpPr>
-            <a:spLocks noGrp="1"/>
-          </p:cNvSpPr>
-          <p:nvPr>
-            <p:ph type="ftr" sz="quarter" idx="11"/>
-          </p:nvPr>
-        </p:nvSpPr>
-        <p:spPr/>
-        <p:txBody>
-          <a:bodyPr/>
-          <a:lstStyle/>
-          <a:p>
-            <a:r>
-              <a:rPr lang="en-US" dirty="0"/>
-              <a:t>www.anubhavtrainings.com</a:t>
-            </a:r>
-          </a:p>
-        </p:txBody>
-      </p:sp>
-      <p:sp>
-        <p:nvSpPr>
-          <p:cNvPr id="4" name="Slide Number Placeholder 3">
-            <a:extLst>
-              <a:ext uri="{FF2B5EF4-FFF2-40B4-BE49-F238E27FC236}">
-                <a16:creationId xmlns:a16="http://schemas.microsoft.com/office/drawing/2014/main" id="{81648108-C9B3-B016-52FD-5090BB69C00F}"/>
-              </a:ext>
-            </a:extLst>
-          </p:cNvPr>
-          <p:cNvSpPr>
-            <a:spLocks noGrp="1"/>
-          </p:cNvSpPr>
-          <p:nvPr>
-            <p:ph type="sldNum" sz="quarter" idx="12"/>
-          </p:nvPr>
-        </p:nvSpPr>
-        <p:spPr>
-          <a:xfrm>
-            <a:off x="152400" y="4781550"/>
-            <a:ext cx="457200" cy="273844"/>
-          </a:xfrm>
-        </p:spPr>
-        <p:txBody>
-          <a:bodyPr/>
-          <a:lstStyle/>
-          <a:p>
-            <a:fld id="{B6F15528-21DE-4FAA-801E-634DDDAF4B2B}" type="slidenum">
-              <a:rPr lang="en-US" smtClean="0"/>
-              <a:pPr/>
-              <a:t>8</a:t>
-            </a:fld>
-            <a:endParaRPr lang="en-US" dirty="0"/>
-          </a:p>
-        </p:txBody>
-      </p:sp>
-      <p:sp>
-        <p:nvSpPr>
-          <p:cNvPr id="5" name="Title 4">
-            <a:extLst>
-              <a:ext uri="{FF2B5EF4-FFF2-40B4-BE49-F238E27FC236}">
-                <a16:creationId xmlns:a16="http://schemas.microsoft.com/office/drawing/2014/main" id="{98A2D139-4821-BFA6-161B-B1E8747D3BF1}"/>
-              </a:ext>
-            </a:extLst>
-          </p:cNvPr>
-          <p:cNvSpPr>
-            <a:spLocks noGrp="1"/>
-          </p:cNvSpPr>
-          <p:nvPr>
-            <p:ph type="title"/>
-          </p:nvPr>
-        </p:nvSpPr>
-        <p:spPr>
-          <a:xfrm>
-            <a:off x="76200" y="133350"/>
-            <a:ext cx="8229600" cy="533401"/>
-          </a:xfrm>
-        </p:spPr>
-        <p:txBody>
-          <a:bodyPr/>
-          <a:lstStyle/>
-          <a:p>
-            <a:r>
-              <a:rPr lang="en-US" sz="2500" dirty="0">
-                <a:latin typeface="Cooper Black" panose="0208090404030B020404" pitchFamily="18" charset="0"/>
-              </a:rPr>
-              <a:t>Additional Data Resource types</a:t>
-            </a:r>
-            <a:endParaRPr lang="en-IN" sz="2500" dirty="0">
-              <a:latin typeface="Cooper Black" panose="0208090404030B020404" pitchFamily="18" charset="0"/>
-            </a:endParaRPr>
-          </a:p>
-        </p:txBody>
-      </p:sp>
-      <p:sp>
-        <p:nvSpPr>
-          <p:cNvPr id="2" name="TextBox 1">
-            <a:extLst>
-              <a:ext uri="{FF2B5EF4-FFF2-40B4-BE49-F238E27FC236}">
-                <a16:creationId xmlns:a16="http://schemas.microsoft.com/office/drawing/2014/main" id="{C565383F-0933-2687-340E-3CD0BC8BD04B}"/>
-              </a:ext>
-            </a:extLst>
-          </p:cNvPr>
-          <p:cNvSpPr txBox="1"/>
-          <p:nvPr/>
-        </p:nvSpPr>
-        <p:spPr>
-          <a:xfrm>
-            <a:off x="152400" y="971549"/>
-            <a:ext cx="8839200" cy="4069557"/>
-          </a:xfrm>
-          <a:prstGeom prst="rect">
-            <a:avLst/>
-          </a:prstGeom>
-        </p:spPr>
-        <p:txBody>
-          <a:bodyPr vert="horz" lIns="91440" tIns="45720" rIns="91440" bIns="45720" rtlCol="0">
-            <a:normAutofit/>
-          </a:bodyPr>
-          <a:lstStyle/>
-          <a:p>
-            <a:pPr>
-              <a:spcBef>
-                <a:spcPct val="20000"/>
-              </a:spcBef>
-              <a:buFont typeface="Arial" pitchFamily="34" charset="0"/>
-            </a:pPr>
-            <a:r>
-              <a:rPr lang="en-US" sz="1400" b="0" i="0" dirty="0">
-                <a:solidFill>
-                  <a:srgbClr val="223548"/>
-                </a:solidFill>
-                <a:effectLst/>
-                <a:latin typeface="72 Brand Variable"/>
-              </a:rPr>
-              <a:t>There are some additional and important data resource types – especially for use in connecting to SAP back-ends – that depend on users being authenticated via SAP BTP</a:t>
-            </a:r>
-          </a:p>
-          <a:p>
-            <a:pPr>
-              <a:spcBef>
-                <a:spcPct val="20000"/>
-              </a:spcBef>
-              <a:buFont typeface="Arial" pitchFamily="34" charset="0"/>
-            </a:pPr>
-            <a:endParaRPr lang="en-US" sz="1400" dirty="0">
-              <a:solidFill>
-                <a:srgbClr val="223548"/>
-              </a:solidFill>
-              <a:latin typeface="72 Brand Variable"/>
-            </a:endParaRPr>
-          </a:p>
-          <a:p>
-            <a:pPr>
-              <a:spcBef>
-                <a:spcPct val="20000"/>
-              </a:spcBef>
-              <a:buFont typeface="Arial" pitchFamily="34" charset="0"/>
-            </a:pPr>
-            <a:r>
-              <a:rPr lang="en-US" sz="1400" b="1" dirty="0"/>
-              <a:t>Visual Cloud Functions Integration</a:t>
-            </a:r>
-            <a:r>
-              <a:rPr lang="en-US" sz="1400" dirty="0"/>
-              <a:t> - Visual Cloud Functions lets you easily create your own data store, not just connect to an existing one, and let multiple apps access it and let you share the data among many users.</a:t>
-            </a:r>
-          </a:p>
-          <a:p>
-            <a:pPr>
-              <a:spcBef>
-                <a:spcPct val="20000"/>
-              </a:spcBef>
-              <a:buFont typeface="Arial" pitchFamily="34" charset="0"/>
-            </a:pPr>
-            <a:r>
-              <a:rPr lang="en-US" sz="1400" b="1" dirty="0"/>
-              <a:t>OData Integration with BTP Destination</a:t>
-            </a:r>
-            <a:r>
-              <a:rPr lang="en-US" sz="1400" dirty="0"/>
-              <a:t> - OData with a BTP destination is the same as without except that the URL and authentication is defined by an SAP BTP destination.</a:t>
-            </a:r>
-          </a:p>
-          <a:p>
-            <a:pPr>
-              <a:spcBef>
-                <a:spcPct val="20000"/>
-              </a:spcBef>
-              <a:buFont typeface="Arial" pitchFamily="34" charset="0"/>
-            </a:pPr>
-            <a:r>
-              <a:rPr lang="en-US" sz="1400" b="1" dirty="0"/>
-              <a:t>REST Integration with BTP Destinations</a:t>
-            </a:r>
-            <a:r>
-              <a:rPr lang="en-US" sz="1400" dirty="0"/>
-              <a:t> - REST with a BTP destination is the same as without except that the URL and authentication is defined by an SAP BTP destination.</a:t>
-            </a:r>
-          </a:p>
-          <a:p>
-            <a:pPr>
-              <a:spcBef>
-                <a:spcPct val="20000"/>
-              </a:spcBef>
-              <a:buFont typeface="Arial" pitchFamily="34" charset="0"/>
-            </a:pPr>
-            <a:endParaRPr lang="en-US" sz="1400" dirty="0"/>
-          </a:p>
-        </p:txBody>
-      </p:sp>
-    </p:spTree>
-    <p:extLst>
-      <p:ext uri="{BB962C8B-B14F-4D97-AF65-F5344CB8AC3E}">
-        <p14:creationId xmlns:p14="http://schemas.microsoft.com/office/powerpoint/2010/main" val="2002470741"/>
-      </p:ext>
-    </p:extLst>
-  </p:cSld>
-  <p:clrMapOvr>
-    <a:masterClrMapping/>
-  </p:clrMapOvr>
-  <mc:AlternateContent xmlns:mc="http://schemas.openxmlformats.org/markup-compatibility/2006" xmlns:p14="http://schemas.microsoft.com/office/powerpoint/2010/main">
-    <mc:Choice Requires="p14">
-      <p:transition spd="med" p14:dur="700">
-        <p:fade/>
-      </p:transition>
-    </mc:Choice>
-    <mc:Fallback xmlns="">
-      <p:transition spd="med">
-        <p:fade/>
-      </p:transition>
-    </mc:Fallback>
-  </mc:AlternateContent>
-</p:sld>
-</file>
-
-<file path=ppt/slides/slide9.xml><?xml version="1.0" encoding="utf-8"?>
-<p:sld xmlns:a="http://schemas.openxmlformats.org/drawingml/2006/main" xmlns:r="http://schemas.openxmlformats.org/officeDocument/2006/relationships" xmlns:p="http://schemas.openxmlformats.org/presentationml/2006/main">
-  <p:cSld>
-    <p:spTree>
-      <p:nvGrpSpPr>
-        <p:cNvPr id="1" name="">
-          <a:extLst>
-            <a:ext uri="{FF2B5EF4-FFF2-40B4-BE49-F238E27FC236}">
-              <a16:creationId xmlns:a16="http://schemas.microsoft.com/office/drawing/2014/main" id="{63D0D6BA-3567-668B-95CA-1594D6F9655D}"/>
-            </a:ext>
-          </a:extLst>
-        </p:cNvPr>
-        <p:cNvGrpSpPr/>
-        <p:nvPr/>
-      </p:nvGrpSpPr>
-      <p:grpSpPr>
-        <a:xfrm>
-          <a:off x="0" y="0"/>
-          <a:ext cx="0" cy="0"/>
-          <a:chOff x="0" y="0"/>
-          <a:chExt cx="0" cy="0"/>
-        </a:xfrm>
-      </p:grpSpPr>
-      <p:sp>
-        <p:nvSpPr>
-          <p:cNvPr id="3" name="Footer Placeholder 2">
-            <a:extLst>
-              <a:ext uri="{FF2B5EF4-FFF2-40B4-BE49-F238E27FC236}">
-                <a16:creationId xmlns:a16="http://schemas.microsoft.com/office/drawing/2014/main" id="{74E58177-4A88-4D15-D620-7BD57D356997}"/>
-              </a:ext>
-            </a:extLst>
-          </p:cNvPr>
-          <p:cNvSpPr>
-            <a:spLocks noGrp="1"/>
-          </p:cNvSpPr>
-          <p:nvPr>
-            <p:ph type="ftr" sz="quarter" idx="11"/>
-          </p:nvPr>
-        </p:nvSpPr>
-        <p:spPr/>
-        <p:txBody>
-          <a:bodyPr/>
-          <a:lstStyle/>
-          <a:p>
-            <a:r>
-              <a:rPr lang="en-US" dirty="0"/>
-              <a:t>www.anubhavtrainings.com</a:t>
-            </a:r>
-          </a:p>
-        </p:txBody>
-      </p:sp>
-      <p:sp>
-        <p:nvSpPr>
-          <p:cNvPr id="4" name="Slide Number Placeholder 3">
-            <a:extLst>
-              <a:ext uri="{FF2B5EF4-FFF2-40B4-BE49-F238E27FC236}">
-                <a16:creationId xmlns:a16="http://schemas.microsoft.com/office/drawing/2014/main" id="{BCAF5441-0C97-DF54-0FED-E24830EC8A76}"/>
-              </a:ext>
-            </a:extLst>
-          </p:cNvPr>
-          <p:cNvSpPr>
-            <a:spLocks noGrp="1"/>
-          </p:cNvSpPr>
-          <p:nvPr>
-            <p:ph type="sldNum" sz="quarter" idx="12"/>
-          </p:nvPr>
-        </p:nvSpPr>
-        <p:spPr>
-          <a:xfrm>
-            <a:off x="152400" y="4781550"/>
-            <a:ext cx="457200" cy="273844"/>
-          </a:xfrm>
-        </p:spPr>
-        <p:txBody>
-          <a:bodyPr/>
-          <a:lstStyle/>
-          <a:p>
-            <a:fld id="{B6F15528-21DE-4FAA-801E-634DDDAF4B2B}" type="slidenum">
-              <a:rPr lang="en-US" smtClean="0"/>
-              <a:pPr/>
-              <a:t>9</a:t>
-            </a:fld>
-            <a:endParaRPr lang="en-US" dirty="0"/>
-          </a:p>
-        </p:txBody>
-      </p:sp>
-      <p:sp>
-        <p:nvSpPr>
-          <p:cNvPr id="5" name="Title 4">
-            <a:extLst>
-              <a:ext uri="{FF2B5EF4-FFF2-40B4-BE49-F238E27FC236}">
-                <a16:creationId xmlns:a16="http://schemas.microsoft.com/office/drawing/2014/main" id="{3488BEF7-4195-D3AC-D899-F2F442A4BA80}"/>
-              </a:ext>
-            </a:extLst>
-          </p:cNvPr>
-          <p:cNvSpPr>
-            <a:spLocks noGrp="1"/>
-          </p:cNvSpPr>
-          <p:nvPr>
-            <p:ph type="title"/>
-          </p:nvPr>
-        </p:nvSpPr>
-        <p:spPr>
-          <a:xfrm>
-            <a:off x="76200" y="133350"/>
-            <a:ext cx="8229600" cy="533401"/>
-          </a:xfrm>
-        </p:spPr>
-        <p:txBody>
-          <a:bodyPr/>
-          <a:lstStyle/>
-          <a:p>
-            <a:r>
-              <a:rPr lang="en-US" sz="2500" dirty="0">
-                <a:latin typeface="Cooper Black" panose="0208090404030B020404" pitchFamily="18" charset="0"/>
-              </a:rPr>
-              <a:t>What is Destination in BTP</a:t>
-            </a:r>
-            <a:endParaRPr lang="en-IN" sz="2500" dirty="0">
-              <a:latin typeface="Cooper Black" panose="0208090404030B020404" pitchFamily="18" charset="0"/>
-            </a:endParaRPr>
-          </a:p>
-        </p:txBody>
-      </p:sp>
-      <p:sp>
-        <p:nvSpPr>
-          <p:cNvPr id="2" name="TextBox 1">
-            <a:extLst>
-              <a:ext uri="{FF2B5EF4-FFF2-40B4-BE49-F238E27FC236}">
-                <a16:creationId xmlns:a16="http://schemas.microsoft.com/office/drawing/2014/main" id="{B8DAA500-1F14-B33A-76BA-60D0BB21A4B9}"/>
-              </a:ext>
-            </a:extLst>
-          </p:cNvPr>
-          <p:cNvSpPr txBox="1"/>
-          <p:nvPr/>
-        </p:nvSpPr>
-        <p:spPr>
-          <a:xfrm>
-            <a:off x="152400" y="971549"/>
-            <a:ext cx="8839200" cy="4069557"/>
-          </a:xfrm>
-          <a:prstGeom prst="rect">
-            <a:avLst/>
-          </a:prstGeom>
-        </p:spPr>
-        <p:txBody>
-          <a:bodyPr vert="horz" lIns="91440" tIns="45720" rIns="91440" bIns="45720" rtlCol="0">
-            <a:normAutofit/>
-          </a:bodyPr>
-          <a:lstStyle/>
-          <a:p>
-            <a:pPr>
-              <a:spcBef>
-                <a:spcPct val="20000"/>
-              </a:spcBef>
-              <a:buFont typeface="Arial" pitchFamily="34" charset="0"/>
-            </a:pPr>
-            <a:r>
-              <a:rPr lang="en-US" sz="1400" b="1" dirty="0"/>
-              <a:t>SAP BTP Destination</a:t>
-            </a:r>
-            <a:r>
-              <a:rPr lang="en-US" sz="1400" dirty="0"/>
-              <a:t> is a configuration object within </a:t>
-            </a:r>
-            <a:r>
-              <a:rPr lang="en-US" sz="1400" b="1" dirty="0"/>
-              <a:t>SAP Business Technology Platform (BTP)</a:t>
-            </a:r>
-            <a:r>
-              <a:rPr lang="en-US" sz="1400" dirty="0"/>
-              <a:t> that allows applications to connect to external systems or services in a secure and managed way. </a:t>
-            </a:r>
-          </a:p>
-          <a:p>
-            <a:pPr>
-              <a:spcBef>
-                <a:spcPct val="20000"/>
-              </a:spcBef>
-              <a:buFont typeface="Arial" pitchFamily="34" charset="0"/>
-            </a:pPr>
-            <a:endParaRPr lang="en-US" sz="1400" dirty="0"/>
-          </a:p>
-          <a:p>
-            <a:pPr>
-              <a:spcBef>
-                <a:spcPct val="20000"/>
-              </a:spcBef>
-              <a:buFont typeface="Arial" pitchFamily="34" charset="0"/>
-            </a:pPr>
-            <a:r>
-              <a:rPr lang="en-US" sz="1400" dirty="0"/>
-              <a:t>These destinations store connection settings like URLs, authentication, and proxy settings, enabling seamless communication between your BTP applications (like those running on SAP CAP, UI5, or Fiori) and other systems (such as on-premise SAP systems, third-party APIs, or cloud services).</a:t>
-            </a:r>
-          </a:p>
-        </p:txBody>
-      </p:sp>
-    </p:spTree>
-    <p:extLst>
-      <p:ext uri="{BB962C8B-B14F-4D97-AF65-F5344CB8AC3E}">
-        <p14:creationId xmlns:p14="http://schemas.microsoft.com/office/powerpoint/2010/main" val="4208077122"/>
       </p:ext>
     </p:extLst>
   </p:cSld>
